--- a/projects/Capstone Project/1. Lightning Talk #1/Presentation.pptx
+++ b/projects/Capstone Project/1. Lightning Talk #1/Presentation.pptx
@@ -5,7 +5,7 @@
     <p:sldMasterId id="2147483648" r:id="rId1"/>
   </p:sldMasterIdLst>
   <p:notesMasterIdLst>
-    <p:notesMasterId r:id="rId9"/>
+    <p:notesMasterId r:id="rId10"/>
   </p:notesMasterIdLst>
   <p:sldIdLst>
     <p:sldId id="256" r:id="rId2"/>
@@ -15,6 +15,7 @@
     <p:sldId id="260" r:id="rId6"/>
     <p:sldId id="261" r:id="rId7"/>
     <p:sldId id="262" r:id="rId8"/>
+    <p:sldId id="264" r:id="rId9"/>
   </p:sldIdLst>
   <p:sldSz cx="12192000" cy="6858000"/>
   <p:notesSz cx="6858000" cy="12192000"/>
@@ -822,6 +823,114 @@
     <p:extLst>
       <p:ext uri="{BB962C8B-B14F-4D97-AF65-F5344CB8AC3E}">
         <p14:creationId xmlns:p14="http://schemas.microsoft.com/office/powerpoint/2010/main" val="1024086991"/>
+      </p:ext>
+    </p:extLst>
+  </p:cSld>
+  <p:clrMapOvr>
+    <a:masterClrMapping/>
+  </p:clrMapOvr>
+</p:notes>
+</file>
+
+<file path=ppt/notesSlides/notesSlide8.xml><?xml version="1.0" encoding="utf-8"?>
+<p:notes xmlns:a="http://schemas.openxmlformats.org/drawingml/2006/main" xmlns:r="http://schemas.openxmlformats.org/officeDocument/2006/relationships" xmlns:p="http://schemas.openxmlformats.org/presentationml/2006/main">
+  <p:cSld>
+    <p:spTree>
+      <p:nvGrpSpPr>
+        <p:cNvPr id="1" name="">
+          <a:extLst>
+            <a:ext uri="{FF2B5EF4-FFF2-40B4-BE49-F238E27FC236}">
+              <a16:creationId xmlns:a16="http://schemas.microsoft.com/office/drawing/2014/main" id="{DD4265FF-67AD-C6ED-399B-1884153098A6}"/>
+            </a:ext>
+          </a:extLst>
+        </p:cNvPr>
+        <p:cNvGrpSpPr/>
+        <p:nvPr/>
+      </p:nvGrpSpPr>
+      <p:grpSpPr>
+        <a:xfrm>
+          <a:off x="0" y="0"/>
+          <a:ext cx="0" cy="0"/>
+          <a:chOff x="0" y="0"/>
+          <a:chExt cx="0" cy="0"/>
+        </a:xfrm>
+      </p:grpSpPr>
+      <p:sp>
+        <p:nvSpPr>
+          <p:cNvPr id="2" name="Slide Image Placeholder 1">
+            <a:extLst>
+              <a:ext uri="{FF2B5EF4-FFF2-40B4-BE49-F238E27FC236}">
+                <a16:creationId xmlns:a16="http://schemas.microsoft.com/office/drawing/2014/main" id="{0AB0A3A7-8BDB-6C3E-4166-AF6D3AFD3DB6}"/>
+              </a:ext>
+            </a:extLst>
+          </p:cNvPr>
+          <p:cNvSpPr>
+            <a:spLocks noGrp="1" noRot="1" noChangeAspect="1"/>
+          </p:cNvSpPr>
+          <p:nvPr>
+            <p:ph type="sldImg"/>
+          </p:nvPr>
+        </p:nvSpPr>
+        <p:spPr/>
+      </p:sp>
+      <p:sp>
+        <p:nvSpPr>
+          <p:cNvPr id="3" name="Notes Placeholder 2">
+            <a:extLst>
+              <a:ext uri="{FF2B5EF4-FFF2-40B4-BE49-F238E27FC236}">
+                <a16:creationId xmlns:a16="http://schemas.microsoft.com/office/drawing/2014/main" id="{E2DBA7F0-0284-B62A-72DD-D4FF0F21ACB2}"/>
+              </a:ext>
+            </a:extLst>
+          </p:cNvPr>
+          <p:cNvSpPr>
+            <a:spLocks noGrp="1"/>
+          </p:cNvSpPr>
+          <p:nvPr>
+            <p:ph type="body" idx="1"/>
+          </p:nvPr>
+        </p:nvSpPr>
+        <p:spPr/>
+        <p:txBody>
+          <a:bodyPr/>
+          <a:lstStyle/>
+          <a:p>
+            <a:endParaRPr lang="en-US" dirty="0"/>
+          </a:p>
+        </p:txBody>
+      </p:sp>
+      <p:sp>
+        <p:nvSpPr>
+          <p:cNvPr id="4" name="Slide Number Placeholder 3">
+            <a:extLst>
+              <a:ext uri="{FF2B5EF4-FFF2-40B4-BE49-F238E27FC236}">
+                <a16:creationId xmlns:a16="http://schemas.microsoft.com/office/drawing/2014/main" id="{9060A279-8624-55D3-DA69-07DD558B4B2E}"/>
+              </a:ext>
+            </a:extLst>
+          </p:cNvPr>
+          <p:cNvSpPr>
+            <a:spLocks noGrp="1"/>
+          </p:cNvSpPr>
+          <p:nvPr>
+            <p:ph type="sldNum" sz="quarter" idx="10"/>
+          </p:nvPr>
+        </p:nvSpPr>
+        <p:spPr/>
+        <p:txBody>
+          <a:bodyPr/>
+          <a:lstStyle/>
+          <a:p>
+            <a:fld id="{F7021451-1387-4CA6-816F-3879F97B5CBC}" type="slidenum">
+              <a:rPr lang="en-US"/>
+              <a:t>8</a:t>
+            </a:fld>
+            <a:endParaRPr lang="en-US"/>
+          </a:p>
+        </p:txBody>
+      </p:sp>
+    </p:spTree>
+    <p:extLst>
+      <p:ext uri="{BB962C8B-B14F-4D97-AF65-F5344CB8AC3E}">
+        <p14:creationId xmlns:p14="http://schemas.microsoft.com/office/powerpoint/2010/main" val="1165394724"/>
       </p:ext>
     </p:extLst>
   </p:cSld>
@@ -2326,160 +2435,20 @@
       </p:grpSpPr>
       <p:sp>
         <p:nvSpPr>
-          <p:cNvPr id="2" name="Shape 0"/>
-          <p:cNvSpPr/>
-          <p:nvPr/>
-        </p:nvSpPr>
-        <p:spPr>
-          <a:xfrm>
-            <a:off x="548640" y="502920"/>
-            <a:ext cx="1463040" cy="292608"/>
-          </a:xfrm>
-          <a:prstGeom prst="roundRect">
-            <a:avLst>
-              <a:gd name="adj" fmla="val 18750"/>
-            </a:avLst>
-          </a:prstGeom>
-          <a:solidFill>
-            <a:srgbClr val="1E2761"/>
-          </a:solidFill>
-          <a:ln/>
-        </p:spPr>
-        <p:txBody>
-          <a:bodyPr/>
-          <a:lstStyle/>
-          <a:p>
-            <a:endParaRPr lang="en-BH"/>
-          </a:p>
-        </p:txBody>
-      </p:sp>
-      <p:sp>
-        <p:nvSpPr>
-          <p:cNvPr id="3" name="Text 1"/>
-          <p:cNvSpPr/>
-          <p:nvPr/>
-        </p:nvSpPr>
-        <p:spPr>
-          <a:xfrm>
-            <a:off x="548640" y="502920"/>
-            <a:ext cx="1463040" cy="292608"/>
-          </a:xfrm>
-          <a:prstGeom prst="rect">
-            <a:avLst/>
-          </a:prstGeom>
-          <a:noFill/>
-          <a:ln/>
-        </p:spPr>
-        <p:txBody>
-          <a:bodyPr wrap="square" lIns="0" tIns="0" rIns="0" bIns="0" rtlCol="0" anchor="ctr"/>
-          <a:lstStyle/>
-          <a:p>
-            <a:pPr marL="0" indent="0" algn="ctr">
-              <a:buNone/>
-            </a:pPr>
-            <a:r>
-              <a:rPr lang="en-US" sz="1000" b="1" kern="0" spc="100" dirty="0">
-                <a:solidFill>
-                  <a:srgbClr val="FFFFFF"/>
-                </a:solidFill>
-                <a:latin typeface="Calibri" pitchFamily="34" charset="0"/>
-                <a:ea typeface="Calibri" pitchFamily="34" charset="-122"/>
-                <a:cs typeface="Calibri" pitchFamily="34" charset="-120"/>
-              </a:rPr>
-              <a:t>TOPIC 1</a:t>
-            </a:r>
-            <a:endParaRPr lang="en-US" sz="1000" dirty="0"/>
-          </a:p>
-        </p:txBody>
-      </p:sp>
-      <p:sp>
-        <p:nvSpPr>
-          <p:cNvPr id="4" name="Text 2"/>
-          <p:cNvSpPr/>
-          <p:nvPr/>
-        </p:nvSpPr>
-        <p:spPr>
-          <a:xfrm>
-            <a:off x="548640" y="896112"/>
-            <a:ext cx="8686800" cy="548640"/>
-          </a:xfrm>
-          <a:prstGeom prst="rect">
-            <a:avLst/>
-          </a:prstGeom>
-          <a:noFill/>
-          <a:ln/>
-        </p:spPr>
-        <p:txBody>
-          <a:bodyPr wrap="square" lIns="0" tIns="0" rIns="0" bIns="0" rtlCol="0" anchor="ctr"/>
-          <a:lstStyle/>
-          <a:p>
-            <a:pPr marL="0" indent="0">
-              <a:buNone/>
-            </a:pPr>
-            <a:r>
-              <a:rPr lang="en-US" sz="2800" b="1" dirty="0">
-                <a:solidFill>
-                  <a:srgbClr val="1A1A2E"/>
-                </a:solidFill>
-                <a:latin typeface="Cambria" pitchFamily="34" charset="0"/>
-                <a:ea typeface="Cambria" pitchFamily="34" charset="-122"/>
-                <a:cs typeface="Cambria" pitchFamily="34" charset="-120"/>
-              </a:rPr>
-              <a:t>EDA Findings</a:t>
-            </a:r>
-            <a:endParaRPr lang="en-US" sz="2800" dirty="0"/>
-          </a:p>
-        </p:txBody>
-      </p:sp>
-      <p:sp>
-        <p:nvSpPr>
-          <p:cNvPr id="5" name="Text 3"/>
-          <p:cNvSpPr/>
-          <p:nvPr/>
-        </p:nvSpPr>
-        <p:spPr>
-          <a:xfrm>
-            <a:off x="548640" y="1389888"/>
-            <a:ext cx="8686800" cy="320040"/>
-          </a:xfrm>
-          <a:prstGeom prst="rect">
-            <a:avLst/>
-          </a:prstGeom>
-          <a:noFill/>
-          <a:ln/>
-        </p:spPr>
-        <p:txBody>
-          <a:bodyPr wrap="square" lIns="0" tIns="0" rIns="0" bIns="0" rtlCol="0" anchor="ctr"/>
-          <a:lstStyle/>
-          <a:p>
-            <a:pPr marL="0" indent="0">
-              <a:buNone/>
-            </a:pPr>
-            <a:r>
-              <a:rPr lang="en-US" sz="1200" i="1" dirty="0">
-                <a:solidFill>
-                  <a:srgbClr val="6B7280"/>
-                </a:solidFill>
-                <a:latin typeface="Calibri" pitchFamily="34" charset="0"/>
-                <a:ea typeface="Calibri" pitchFamily="34" charset="-122"/>
-                <a:cs typeface="Calibri" pitchFamily="34" charset="-120"/>
-              </a:rPr>
-              <a:t>Bank Loan Status</a:t>
-            </a:r>
-            <a:endParaRPr lang="en-US" sz="1200" dirty="0"/>
-          </a:p>
-        </p:txBody>
-      </p:sp>
-      <p:sp>
-        <p:nvSpPr>
-          <p:cNvPr id="6" name="Shape 4"/>
-          <p:cNvSpPr/>
-          <p:nvPr/>
-        </p:nvSpPr>
-        <p:spPr>
-          <a:xfrm>
-            <a:off x="548640" y="1920240"/>
-            <a:ext cx="5387188" cy="1600200"/>
+          <p:cNvPr id="36" name="Shape 10">
+            <a:extLst>
+              <a:ext uri="{FF2B5EF4-FFF2-40B4-BE49-F238E27FC236}">
+                <a16:creationId xmlns:a16="http://schemas.microsoft.com/office/drawing/2014/main" id="{9A2D5B17-1B05-8E43-66C6-583D21BE09DC}"/>
+              </a:ext>
+            </a:extLst>
+          </p:cNvPr>
+          <p:cNvSpPr/>
+          <p:nvPr/>
+        </p:nvSpPr>
+        <p:spPr>
+          <a:xfrm>
+            <a:off x="556717" y="4116579"/>
+            <a:ext cx="5387188" cy="1854073"/>
           </a:xfrm>
           <a:prstGeom prst="roundRect">
             <a:avLst>
@@ -2500,183 +2469,26 @@
           <a:bodyPr/>
           <a:lstStyle/>
           <a:p>
-            <a:endParaRPr lang="en-BH"/>
-          </a:p>
-        </p:txBody>
-      </p:sp>
-      <p:sp>
-        <p:nvSpPr>
-          <p:cNvPr id="7" name="Shape 5"/>
-          <p:cNvSpPr/>
-          <p:nvPr/>
-        </p:nvSpPr>
-        <p:spPr>
-          <a:xfrm>
-            <a:off x="822960" y="2176272"/>
-            <a:ext cx="384048" cy="384048"/>
-          </a:xfrm>
-          <a:prstGeom prst="roundRect">
-            <a:avLst>
-              <a:gd name="adj" fmla="val 119048"/>
-            </a:avLst>
-          </a:prstGeom>
-          <a:solidFill>
-            <a:srgbClr val="1E2761"/>
-          </a:solidFill>
-          <a:ln/>
-        </p:spPr>
-        <p:txBody>
-          <a:bodyPr/>
-          <a:lstStyle/>
-          <a:p>
-            <a:endParaRPr lang="en-BH"/>
-          </a:p>
-        </p:txBody>
-      </p:sp>
-      <p:sp>
-        <p:nvSpPr>
-          <p:cNvPr id="8" name="Text 6"/>
-          <p:cNvSpPr/>
-          <p:nvPr/>
-        </p:nvSpPr>
-        <p:spPr>
-          <a:xfrm>
-            <a:off x="822960" y="2176272"/>
-            <a:ext cx="384048" cy="384048"/>
-          </a:xfrm>
-          <a:prstGeom prst="rect">
-            <a:avLst/>
-          </a:prstGeom>
-          <a:noFill/>
-          <a:ln/>
-        </p:spPr>
-        <p:txBody>
-          <a:bodyPr wrap="square" lIns="0" tIns="0" rIns="0" bIns="0" rtlCol="0" anchor="ctr"/>
-          <a:lstStyle/>
-          <a:p>
-            <a:pPr marL="0" indent="0" algn="ctr">
-              <a:buNone/>
-            </a:pPr>
-            <a:r>
-              <a:rPr lang="en-US" sz="1400" b="1" dirty="0">
-                <a:solidFill>
-                  <a:srgbClr val="FFFFFF"/>
-                </a:solidFill>
-                <a:latin typeface="Cambria" pitchFamily="34" charset="0"/>
-                <a:ea typeface="Cambria" pitchFamily="34" charset="-122"/>
-                <a:cs typeface="Cambria" pitchFamily="34" charset="-120"/>
-              </a:rPr>
-              <a:t>1</a:t>
-            </a:r>
-            <a:endParaRPr lang="en-US" sz="1400" dirty="0"/>
-          </a:p>
-        </p:txBody>
-      </p:sp>
-      <p:sp>
-        <p:nvSpPr>
-          <p:cNvPr id="9" name="Text 7"/>
-          <p:cNvSpPr/>
-          <p:nvPr/>
-        </p:nvSpPr>
-        <p:spPr>
-          <a:xfrm>
-            <a:off x="1325880" y="2139696"/>
-            <a:ext cx="4335628" cy="292608"/>
-          </a:xfrm>
-          <a:prstGeom prst="rect">
-            <a:avLst/>
-          </a:prstGeom>
-          <a:noFill/>
-          <a:ln/>
-        </p:spPr>
-        <p:txBody>
-          <a:bodyPr wrap="square" lIns="0" tIns="0" rIns="0" bIns="0" rtlCol="0" anchor="ctr"/>
-          <a:lstStyle/>
-          <a:p>
-            <a:pPr marL="0" indent="0">
-              <a:buNone/>
-            </a:pPr>
-            <a:r>
-              <a:rPr lang="en-US" sz="1500" b="1" dirty="0">
-                <a:solidFill>
-                  <a:srgbClr val="1A1A2E"/>
-                </a:solidFill>
-                <a:latin typeface="Cambria" pitchFamily="34" charset="0"/>
-                <a:ea typeface="Cambria" pitchFamily="34" charset="-122"/>
-                <a:cs typeface="Cambria" pitchFamily="34" charset="-120"/>
-              </a:rPr>
-              <a:t>Problem Type</a:t>
-            </a:r>
-            <a:endParaRPr lang="en-US" sz="1500" dirty="0"/>
-          </a:p>
-        </p:txBody>
-      </p:sp>
-      <p:sp>
-        <p:nvSpPr>
-          <p:cNvPr id="10" name="Text 8"/>
-          <p:cNvSpPr/>
-          <p:nvPr/>
-        </p:nvSpPr>
-        <p:spPr>
-          <a:xfrm>
-            <a:off x="1325880" y="2423160"/>
-            <a:ext cx="4335628" cy="365760"/>
-          </a:xfrm>
-          <a:prstGeom prst="rect">
-            <a:avLst/>
-          </a:prstGeom>
-          <a:noFill/>
-          <a:ln/>
-        </p:spPr>
-        <p:txBody>
-          <a:bodyPr wrap="square" lIns="0" tIns="0" rIns="0" bIns="0" rtlCol="0" anchor="t"/>
-          <a:lstStyle/>
-          <a:p>
-            <a:pPr marL="0" indent="0">
-              <a:buNone/>
-            </a:pPr>
-            <a:endParaRPr lang="en-US" sz="1050" dirty="0"/>
-          </a:p>
-        </p:txBody>
-      </p:sp>
-      <p:sp>
-        <p:nvSpPr>
-          <p:cNvPr id="11" name="Text 9"/>
-          <p:cNvSpPr/>
-          <p:nvPr/>
-        </p:nvSpPr>
-        <p:spPr>
-          <a:xfrm>
-            <a:off x="822960" y="2953512"/>
-            <a:ext cx="4838548" cy="384048"/>
-          </a:xfrm>
-          <a:prstGeom prst="rect">
-            <a:avLst/>
-          </a:prstGeom>
-          <a:noFill/>
-          <a:ln/>
-        </p:spPr>
-        <p:txBody>
-          <a:bodyPr wrap="square" lIns="0" tIns="0" rIns="0" bIns="0" rtlCol="0" anchor="ctr"/>
-          <a:lstStyle/>
-          <a:p>
-            <a:r>
-              <a:rPr lang="en-US" sz="2200" dirty="0"/>
-              <a:t>Classification</a:t>
-            </a:r>
-          </a:p>
-        </p:txBody>
-      </p:sp>
-      <p:sp>
-        <p:nvSpPr>
-          <p:cNvPr id="12" name="Shape 10"/>
-          <p:cNvSpPr/>
-          <p:nvPr/>
-        </p:nvSpPr>
-        <p:spPr>
-          <a:xfrm>
-            <a:off x="6255868" y="1920240"/>
-            <a:ext cx="5387188" cy="1600200"/>
+            <a:endParaRPr lang="en-BH" dirty="0"/>
+          </a:p>
+        </p:txBody>
+      </p:sp>
+      <p:sp>
+        <p:nvSpPr>
+          <p:cNvPr id="35" name="Shape 10">
+            <a:extLst>
+              <a:ext uri="{FF2B5EF4-FFF2-40B4-BE49-F238E27FC236}">
+                <a16:creationId xmlns:a16="http://schemas.microsoft.com/office/drawing/2014/main" id="{FD7D90ED-66A6-D748-C03A-4FC50C71F94B}"/>
+              </a:ext>
+            </a:extLst>
+          </p:cNvPr>
+          <p:cNvSpPr/>
+          <p:nvPr/>
+        </p:nvSpPr>
+        <p:spPr>
+          <a:xfrm>
+            <a:off x="6248096" y="4087369"/>
+            <a:ext cx="5387188" cy="1854073"/>
           </a:xfrm>
           <a:prstGeom prst="roundRect">
             <a:avLst>
@@ -2697,24 +2509,24 @@
           <a:bodyPr/>
           <a:lstStyle/>
           <a:p>
-            <a:endParaRPr lang="en-BH"/>
-          </a:p>
-        </p:txBody>
-      </p:sp>
-      <p:sp>
-        <p:nvSpPr>
-          <p:cNvPr id="13" name="Shape 11"/>
-          <p:cNvSpPr/>
-          <p:nvPr/>
-        </p:nvSpPr>
-        <p:spPr>
-          <a:xfrm>
-            <a:off x="6530188" y="2176272"/>
-            <a:ext cx="384048" cy="384048"/>
+            <a:endParaRPr lang="en-BH" dirty="0"/>
+          </a:p>
+        </p:txBody>
+      </p:sp>
+      <p:sp>
+        <p:nvSpPr>
+          <p:cNvPr id="2" name="Shape 0"/>
+          <p:cNvSpPr/>
+          <p:nvPr/>
+        </p:nvSpPr>
+        <p:spPr>
+          <a:xfrm>
+            <a:off x="548640" y="502920"/>
+            <a:ext cx="1463040" cy="292608"/>
           </a:xfrm>
           <a:prstGeom prst="roundRect">
             <a:avLst>
-              <a:gd name="adj" fmla="val 119048"/>
+              <a:gd name="adj" fmla="val 18750"/>
             </a:avLst>
           </a:prstGeom>
           <a:solidFill>
@@ -2732,14 +2544,14 @@
       </p:sp>
       <p:sp>
         <p:nvSpPr>
-          <p:cNvPr id="14" name="Text 12"/>
-          <p:cNvSpPr/>
-          <p:nvPr/>
-        </p:nvSpPr>
-        <p:spPr>
-          <a:xfrm>
-            <a:off x="6530188" y="2176272"/>
-            <a:ext cx="384048" cy="384048"/>
+          <p:cNvPr id="3" name="Text 1"/>
+          <p:cNvSpPr/>
+          <p:nvPr/>
+        </p:nvSpPr>
+        <p:spPr>
+          <a:xfrm>
+            <a:off x="548640" y="502920"/>
+            <a:ext cx="1463040" cy="292608"/>
           </a:xfrm>
           <a:prstGeom prst="rect">
             <a:avLst/>
@@ -2755,30 +2567,69 @@
               <a:buNone/>
             </a:pPr>
             <a:r>
-              <a:rPr lang="en-US" sz="1400" b="1" dirty="0">
+              <a:rPr lang="en-US" sz="1000" b="1" kern="0" spc="100" dirty="0">
                 <a:solidFill>
                   <a:srgbClr val="FFFFFF"/>
+                </a:solidFill>
+                <a:latin typeface="Calibri" pitchFamily="34" charset="0"/>
+                <a:ea typeface="Calibri" pitchFamily="34" charset="-122"/>
+                <a:cs typeface="Calibri" pitchFamily="34" charset="-120"/>
+              </a:rPr>
+              <a:t>TOPIC 1</a:t>
+            </a:r>
+            <a:endParaRPr lang="en-US" sz="1000" dirty="0"/>
+          </a:p>
+        </p:txBody>
+      </p:sp>
+      <p:sp>
+        <p:nvSpPr>
+          <p:cNvPr id="4" name="Text 2"/>
+          <p:cNvSpPr/>
+          <p:nvPr/>
+        </p:nvSpPr>
+        <p:spPr>
+          <a:xfrm>
+            <a:off x="548640" y="896112"/>
+            <a:ext cx="8686800" cy="548640"/>
+          </a:xfrm>
+          <a:prstGeom prst="rect">
+            <a:avLst/>
+          </a:prstGeom>
+          <a:noFill/>
+          <a:ln/>
+        </p:spPr>
+        <p:txBody>
+          <a:bodyPr wrap="square" lIns="0" tIns="0" rIns="0" bIns="0" rtlCol="0" anchor="ctr"/>
+          <a:lstStyle/>
+          <a:p>
+            <a:pPr marL="0" indent="0">
+              <a:buNone/>
+            </a:pPr>
+            <a:r>
+              <a:rPr lang="en-US" sz="2800" b="1" dirty="0">
+                <a:solidFill>
+                  <a:srgbClr val="1A1A2E"/>
                 </a:solidFill>
                 <a:latin typeface="Cambria" pitchFamily="34" charset="0"/>
                 <a:ea typeface="Cambria" pitchFamily="34" charset="-122"/>
                 <a:cs typeface="Cambria" pitchFamily="34" charset="-120"/>
               </a:rPr>
-              <a:t>2</a:t>
-            </a:r>
-            <a:endParaRPr lang="en-US" sz="1400" dirty="0"/>
-          </a:p>
-        </p:txBody>
-      </p:sp>
-      <p:sp>
-        <p:nvSpPr>
-          <p:cNvPr id="15" name="Text 13"/>
-          <p:cNvSpPr/>
-          <p:nvPr/>
-        </p:nvSpPr>
-        <p:spPr>
-          <a:xfrm>
-            <a:off x="7033108" y="2139696"/>
-            <a:ext cx="4335628" cy="292608"/>
+              <a:t>EDA Findings</a:t>
+            </a:r>
+            <a:endParaRPr lang="en-US" sz="2800" dirty="0"/>
+          </a:p>
+        </p:txBody>
+      </p:sp>
+      <p:sp>
+        <p:nvSpPr>
+          <p:cNvPr id="5" name="Text 3"/>
+          <p:cNvSpPr/>
+          <p:nvPr/>
+        </p:nvSpPr>
+        <p:spPr>
+          <a:xfrm>
+            <a:off x="548640" y="1389888"/>
+            <a:ext cx="8686800" cy="320040"/>
           </a:xfrm>
           <a:prstGeom prst="rect">
             <a:avLst/>
@@ -2794,46 +2645,7 @@
               <a:buNone/>
             </a:pPr>
             <a:r>
-              <a:rPr lang="en-US" sz="1500" b="1" dirty="0">
-                <a:solidFill>
-                  <a:srgbClr val="1A1A2E"/>
-                </a:solidFill>
-                <a:latin typeface="Cambria" pitchFamily="34" charset="0"/>
-                <a:ea typeface="Cambria" pitchFamily="34" charset="-122"/>
-                <a:cs typeface="Cambria" pitchFamily="34" charset="-120"/>
-              </a:rPr>
-              <a:t>Missing Values</a:t>
-            </a:r>
-            <a:endParaRPr lang="en-US" sz="1500" dirty="0"/>
-          </a:p>
-        </p:txBody>
-      </p:sp>
-      <p:sp>
-        <p:nvSpPr>
-          <p:cNvPr id="16" name="Text 14"/>
-          <p:cNvSpPr/>
-          <p:nvPr/>
-        </p:nvSpPr>
-        <p:spPr>
-          <a:xfrm>
-            <a:off x="7033108" y="2423160"/>
-            <a:ext cx="4335628" cy="365760"/>
-          </a:xfrm>
-          <a:prstGeom prst="rect">
-            <a:avLst/>
-          </a:prstGeom>
-          <a:noFill/>
-          <a:ln/>
-        </p:spPr>
-        <p:txBody>
-          <a:bodyPr wrap="square" lIns="0" tIns="0" rIns="0" bIns="0" rtlCol="0" anchor="t"/>
-          <a:lstStyle/>
-          <a:p>
-            <a:pPr marL="0" indent="0">
-              <a:buNone/>
-            </a:pPr>
-            <a:r>
-              <a:rPr lang="en-US" sz="1050" dirty="0">
+              <a:rPr lang="en-US" sz="1200" i="1" dirty="0">
                 <a:solidFill>
                   <a:srgbClr val="6B7280"/>
                 </a:solidFill>
@@ -2841,61 +2653,22 @@
                 <a:ea typeface="Calibri" pitchFamily="34" charset="-122"/>
                 <a:cs typeface="Calibri" pitchFamily="34" charset="-120"/>
               </a:rPr>
-              <a:t>Count / columns affected (or “none”)</a:t>
-            </a:r>
-            <a:endParaRPr lang="en-US" sz="1050" dirty="0"/>
-          </a:p>
-        </p:txBody>
-      </p:sp>
-      <p:sp>
-        <p:nvSpPr>
-          <p:cNvPr id="17" name="Text 15"/>
-          <p:cNvSpPr/>
-          <p:nvPr/>
-        </p:nvSpPr>
-        <p:spPr>
-          <a:xfrm>
-            <a:off x="6530188" y="2953512"/>
-            <a:ext cx="4838548" cy="384048"/>
-          </a:xfrm>
-          <a:prstGeom prst="rect">
-            <a:avLst/>
-          </a:prstGeom>
-          <a:noFill/>
-          <a:ln/>
-        </p:spPr>
-        <p:txBody>
-          <a:bodyPr wrap="square" lIns="0" tIns="0" rIns="0" bIns="0" rtlCol="0" anchor="ctr"/>
-          <a:lstStyle/>
-          <a:p>
-            <a:pPr marL="0" indent="0" algn="l">
-              <a:buNone/>
-            </a:pPr>
-            <a:r>
-              <a:rPr lang="en-US" sz="2200" b="1" dirty="0">
-                <a:solidFill>
-                  <a:srgbClr val="1E2761"/>
-                </a:solidFill>
-                <a:latin typeface="Calibri" pitchFamily="34" charset="0"/>
-                <a:ea typeface="Calibri" pitchFamily="34" charset="-122"/>
-                <a:cs typeface="Calibri" pitchFamily="34" charset="-120"/>
-              </a:rPr>
-              <a:t>[ # ]</a:t>
-            </a:r>
-            <a:endParaRPr lang="en-US" sz="2200" dirty="0"/>
-          </a:p>
-        </p:txBody>
-      </p:sp>
-      <p:sp>
-        <p:nvSpPr>
-          <p:cNvPr id="18" name="Shape 16"/>
-          <p:cNvSpPr/>
-          <p:nvPr/>
-        </p:nvSpPr>
-        <p:spPr>
-          <a:xfrm>
-            <a:off x="548640" y="3840480"/>
-            <a:ext cx="5387188" cy="1600200"/>
+              <a:t>Bank Loan Status</a:t>
+            </a:r>
+            <a:endParaRPr lang="en-US" sz="1200" dirty="0"/>
+          </a:p>
+        </p:txBody>
+      </p:sp>
+      <p:sp>
+        <p:nvSpPr>
+          <p:cNvPr id="6" name="Shape 4"/>
+          <p:cNvSpPr/>
+          <p:nvPr/>
+        </p:nvSpPr>
+        <p:spPr>
+          <a:xfrm>
+            <a:off x="548640" y="1920240"/>
+            <a:ext cx="5387188" cy="1854072"/>
           </a:xfrm>
           <a:prstGeom prst="roundRect">
             <a:avLst>
@@ -2922,13 +2695,13 @@
       </p:sp>
       <p:sp>
         <p:nvSpPr>
-          <p:cNvPr id="19" name="Shape 17"/>
-          <p:cNvSpPr/>
-          <p:nvPr/>
-        </p:nvSpPr>
-        <p:spPr>
-          <a:xfrm>
-            <a:off x="822960" y="4096512"/>
+          <p:cNvPr id="7" name="Shape 5"/>
+          <p:cNvSpPr/>
+          <p:nvPr/>
+        </p:nvSpPr>
+        <p:spPr>
+          <a:xfrm>
+            <a:off x="822960" y="2176272"/>
             <a:ext cx="384048" cy="384048"/>
           </a:xfrm>
           <a:prstGeom prst="roundRect">
@@ -2951,13 +2724,13 @@
       </p:sp>
       <p:sp>
         <p:nvSpPr>
-          <p:cNvPr id="20" name="Text 18"/>
-          <p:cNvSpPr/>
-          <p:nvPr/>
-        </p:nvSpPr>
-        <p:spPr>
-          <a:xfrm>
-            <a:off x="822960" y="4096512"/>
+          <p:cNvPr id="8" name="Text 6"/>
+          <p:cNvSpPr/>
+          <p:nvPr/>
+        </p:nvSpPr>
+        <p:spPr>
+          <a:xfrm>
+            <a:off x="822960" y="2176272"/>
             <a:ext cx="384048" cy="384048"/>
           </a:xfrm>
           <a:prstGeom prst="rect">
@@ -2982,7 +2755,7 @@
                 <a:ea typeface="Cambria" pitchFamily="34" charset="-122"/>
                 <a:cs typeface="Cambria" pitchFamily="34" charset="-120"/>
               </a:rPr>
-              <a:t>3</a:t>
+              <a:t>1</a:t>
             </a:r>
             <a:endParaRPr lang="en-US" sz="1400" dirty="0"/>
           </a:p>
@@ -2990,13 +2763,13 @@
       </p:sp>
       <p:sp>
         <p:nvSpPr>
-          <p:cNvPr id="21" name="Text 19"/>
-          <p:cNvSpPr/>
-          <p:nvPr/>
-        </p:nvSpPr>
-        <p:spPr>
-          <a:xfrm>
-            <a:off x="1325880" y="4059936"/>
+          <p:cNvPr id="9" name="Text 7"/>
+          <p:cNvSpPr/>
+          <p:nvPr/>
+        </p:nvSpPr>
+        <p:spPr>
+          <a:xfrm>
+            <a:off x="1325880" y="2139696"/>
             <a:ext cx="4335628" cy="292608"/>
           </a:xfrm>
           <a:prstGeom prst="rect">
@@ -3021,7 +2794,7 @@
                 <a:ea typeface="Cambria" pitchFamily="34" charset="-122"/>
                 <a:cs typeface="Cambria" pitchFamily="34" charset="-120"/>
               </a:rPr>
-              <a:t>Feature Types</a:t>
+              <a:t>Problem Type</a:t>
             </a:r>
             <a:endParaRPr lang="en-US" sz="1500" dirty="0"/>
           </a:p>
@@ -3029,13 +2802,13 @@
       </p:sp>
       <p:sp>
         <p:nvSpPr>
-          <p:cNvPr id="22" name="Text 20"/>
-          <p:cNvSpPr/>
-          <p:nvPr/>
-        </p:nvSpPr>
-        <p:spPr>
-          <a:xfrm>
-            <a:off x="1325880" y="4343400"/>
+          <p:cNvPr id="10" name="Text 8"/>
+          <p:cNvSpPr/>
+          <p:nvPr/>
+        </p:nvSpPr>
+        <p:spPr>
+          <a:xfrm>
+            <a:off x="1325880" y="2423160"/>
             <a:ext cx="4335628" cy="365760"/>
           </a:xfrm>
           <a:prstGeom prst="rect">
@@ -3051,30 +2824,19 @@
             <a:pPr marL="0" indent="0">
               <a:buNone/>
             </a:pPr>
-            <a:r>
-              <a:rPr lang="en-US" sz="1050" dirty="0">
-                <a:solidFill>
-                  <a:srgbClr val="6B7280"/>
-                </a:solidFill>
-                <a:latin typeface="Calibri" pitchFamily="34" charset="0"/>
-                <a:ea typeface="Calibri" pitchFamily="34" charset="-122"/>
-                <a:cs typeface="Calibri" pitchFamily="34" charset="-120"/>
-              </a:rPr>
-              <a:t>Categorical vs. Continuous columns</a:t>
-            </a:r>
             <a:endParaRPr lang="en-US" sz="1050" dirty="0"/>
           </a:p>
         </p:txBody>
       </p:sp>
       <p:sp>
         <p:nvSpPr>
-          <p:cNvPr id="23" name="Text 21"/>
-          <p:cNvSpPr/>
-          <p:nvPr/>
-        </p:nvSpPr>
-        <p:spPr>
-          <a:xfrm>
-            <a:off x="822960" y="4873752"/>
+          <p:cNvPr id="11" name="Text 9"/>
+          <p:cNvSpPr/>
+          <p:nvPr/>
+        </p:nvSpPr>
+        <p:spPr>
+          <a:xfrm>
+            <a:off x="822960" y="2820924"/>
             <a:ext cx="4838548" cy="384048"/>
           </a:xfrm>
           <a:prstGeom prst="rect">
@@ -3087,34 +2849,39 @@
           <a:bodyPr wrap="square" lIns="0" tIns="0" rIns="0" bIns="0" rtlCol="0" anchor="ctr"/>
           <a:lstStyle/>
           <a:p>
-            <a:pPr marL="0" indent="0" algn="l">
-              <a:buNone/>
-            </a:pPr>
-            <a:r>
-              <a:rPr lang="en-US" sz="2200" b="1" dirty="0">
-                <a:solidFill>
-                  <a:srgbClr val="1E2761"/>
-                </a:solidFill>
-                <a:latin typeface="Calibri" pitchFamily="34" charset="0"/>
-                <a:ea typeface="Calibri" pitchFamily="34" charset="-122"/>
-                <a:cs typeface="Calibri" pitchFamily="34" charset="-120"/>
-              </a:rPr>
-              <a:t>[ # / # ]</a:t>
-            </a:r>
-            <a:endParaRPr lang="en-US" sz="2200" dirty="0"/>
-          </a:p>
-        </p:txBody>
-      </p:sp>
-      <p:sp>
-        <p:nvSpPr>
-          <p:cNvPr id="24" name="Shape 22"/>
-          <p:cNvSpPr/>
-          <p:nvPr/>
-        </p:nvSpPr>
-        <p:spPr>
-          <a:xfrm>
-            <a:off x="6255868" y="3840480"/>
-            <a:ext cx="5387188" cy="1600200"/>
+            <a:r>
+              <a:rPr lang="en-US" dirty="0"/>
+              <a:t>Classification: </a:t>
+            </a:r>
+            <a:r>
+              <a:rPr lang="en-BH" b="1" dirty="0"/>
+              <a:t>Fully Paid</a:t>
+            </a:r>
+            <a:r>
+              <a:rPr lang="en-BH" dirty="0"/>
+              <a:t> or </a:t>
+            </a:r>
+            <a:r>
+              <a:rPr lang="en-BH" b="1" dirty="0"/>
+              <a:t>Charged Off</a:t>
+            </a:r>
+            <a:r>
+              <a:rPr lang="en-US" dirty="0"/>
+              <a:t> </a:t>
+            </a:r>
+          </a:p>
+        </p:txBody>
+      </p:sp>
+      <p:sp>
+        <p:nvSpPr>
+          <p:cNvPr id="12" name="Shape 10"/>
+          <p:cNvSpPr/>
+          <p:nvPr/>
+        </p:nvSpPr>
+        <p:spPr>
+          <a:xfrm>
+            <a:off x="6255868" y="1920239"/>
+            <a:ext cx="5387188" cy="1854073"/>
           </a:xfrm>
           <a:prstGeom prst="roundRect">
             <a:avLst>
@@ -3141,13 +2908,13 @@
       </p:sp>
       <p:sp>
         <p:nvSpPr>
-          <p:cNvPr id="25" name="Shape 23"/>
-          <p:cNvSpPr/>
-          <p:nvPr/>
-        </p:nvSpPr>
-        <p:spPr>
-          <a:xfrm>
-            <a:off x="6530188" y="4096512"/>
+          <p:cNvPr id="13" name="Shape 11"/>
+          <p:cNvSpPr/>
+          <p:nvPr/>
+        </p:nvSpPr>
+        <p:spPr>
+          <a:xfrm>
+            <a:off x="6397600" y="1997964"/>
             <a:ext cx="384048" cy="384048"/>
           </a:xfrm>
           <a:prstGeom prst="roundRect">
@@ -3170,13 +2937,13 @@
       </p:sp>
       <p:sp>
         <p:nvSpPr>
-          <p:cNvPr id="26" name="Text 24"/>
-          <p:cNvSpPr/>
-          <p:nvPr/>
-        </p:nvSpPr>
-        <p:spPr>
-          <a:xfrm>
-            <a:off x="6530188" y="4096512"/>
+          <p:cNvPr id="14" name="Text 12"/>
+          <p:cNvSpPr/>
+          <p:nvPr/>
+        </p:nvSpPr>
+        <p:spPr>
+          <a:xfrm>
+            <a:off x="6397600" y="2008847"/>
             <a:ext cx="384048" cy="384048"/>
           </a:xfrm>
           <a:prstGeom prst="rect">
@@ -3201,7 +2968,7 @@
                 <a:ea typeface="Cambria" pitchFamily="34" charset="-122"/>
                 <a:cs typeface="Cambria" pitchFamily="34" charset="-120"/>
               </a:rPr>
-              <a:t>4</a:t>
+              <a:t>2</a:t>
             </a:r>
             <a:endParaRPr lang="en-US" sz="1400" dirty="0"/>
           </a:p>
@@ -3209,13 +2976,13 @@
       </p:sp>
       <p:sp>
         <p:nvSpPr>
-          <p:cNvPr id="27" name="Text 25"/>
-          <p:cNvSpPr/>
-          <p:nvPr/>
-        </p:nvSpPr>
-        <p:spPr>
-          <a:xfrm>
-            <a:off x="7033108" y="4059936"/>
+          <p:cNvPr id="15" name="Text 13"/>
+          <p:cNvSpPr/>
+          <p:nvPr/>
+        </p:nvSpPr>
+        <p:spPr>
+          <a:xfrm>
+            <a:off x="6914236" y="2057400"/>
             <a:ext cx="4335628" cy="292608"/>
           </a:xfrm>
           <a:prstGeom prst="rect">
@@ -3240,7 +3007,7 @@
                 <a:ea typeface="Cambria" pitchFamily="34" charset="-122"/>
                 <a:cs typeface="Cambria" pitchFamily="34" charset="-120"/>
               </a:rPr>
-              <a:t>Outliers</a:t>
+              <a:t>Missing Values</a:t>
             </a:r>
             <a:endParaRPr lang="en-US" sz="1500" dirty="0"/>
           </a:p>
@@ -3248,13 +3015,13 @@
       </p:sp>
       <p:sp>
         <p:nvSpPr>
-          <p:cNvPr id="28" name="Text 26"/>
-          <p:cNvSpPr/>
-          <p:nvPr/>
-        </p:nvSpPr>
-        <p:spPr>
-          <a:xfrm>
-            <a:off x="7033108" y="4343400"/>
+          <p:cNvPr id="16" name="Text 14"/>
+          <p:cNvSpPr/>
+          <p:nvPr/>
+        </p:nvSpPr>
+        <p:spPr>
+          <a:xfrm>
+            <a:off x="7033108" y="2423160"/>
             <a:ext cx="4335628" cy="365760"/>
           </a:xfrm>
           <a:prstGeom prst="rect">
@@ -3270,31 +3037,270 @@
             <a:pPr marL="0" indent="0">
               <a:buNone/>
             </a:pPr>
-            <a:r>
-              <a:rPr lang="en-US" sz="1050" dirty="0">
-                <a:solidFill>
-                  <a:srgbClr val="6B7280"/>
+            <a:endParaRPr lang="en-US" sz="1050" dirty="0"/>
+          </a:p>
+        </p:txBody>
+      </p:sp>
+      <p:sp>
+        <p:nvSpPr>
+          <p:cNvPr id="19" name="Shape 17"/>
+          <p:cNvSpPr/>
+          <p:nvPr/>
+        </p:nvSpPr>
+        <p:spPr>
+          <a:xfrm>
+            <a:off x="819952" y="4224205"/>
+            <a:ext cx="384048" cy="384048"/>
+          </a:xfrm>
+          <a:prstGeom prst="roundRect">
+            <a:avLst>
+              <a:gd name="adj" fmla="val 119048"/>
+            </a:avLst>
+          </a:prstGeom>
+          <a:solidFill>
+            <a:srgbClr val="1E2761"/>
+          </a:solidFill>
+          <a:ln/>
+        </p:spPr>
+        <p:txBody>
+          <a:bodyPr/>
+          <a:lstStyle/>
+          <a:p>
+            <a:endParaRPr lang="en-BH" dirty="0"/>
+          </a:p>
+        </p:txBody>
+      </p:sp>
+      <p:sp>
+        <p:nvSpPr>
+          <p:cNvPr id="20" name="Text 18"/>
+          <p:cNvSpPr/>
+          <p:nvPr/>
+        </p:nvSpPr>
+        <p:spPr>
+          <a:xfrm>
+            <a:off x="816944" y="4229528"/>
+            <a:ext cx="384048" cy="384048"/>
+          </a:xfrm>
+          <a:prstGeom prst="rect">
+            <a:avLst/>
+          </a:prstGeom>
+          <a:noFill/>
+          <a:ln/>
+        </p:spPr>
+        <p:txBody>
+          <a:bodyPr wrap="square" lIns="0" tIns="0" rIns="0" bIns="0" rtlCol="0" anchor="ctr"/>
+          <a:lstStyle/>
+          <a:p>
+            <a:pPr marL="0" indent="0" algn="ctr">
+              <a:buNone/>
+            </a:pPr>
+            <a:r>
+              <a:rPr lang="en-US" sz="1400" b="1" dirty="0">
+                <a:solidFill>
+                  <a:srgbClr val="FFFFFF"/>
+                </a:solidFill>
+                <a:latin typeface="Cambria" pitchFamily="34" charset="0"/>
+                <a:ea typeface="Cambria" pitchFamily="34" charset="-122"/>
+                <a:cs typeface="Cambria" pitchFamily="34" charset="-120"/>
+              </a:rPr>
+              <a:t>3</a:t>
+            </a:r>
+            <a:endParaRPr lang="en-US" sz="1400" dirty="0"/>
+          </a:p>
+        </p:txBody>
+      </p:sp>
+      <p:sp>
+        <p:nvSpPr>
+          <p:cNvPr id="21" name="Text 19"/>
+          <p:cNvSpPr/>
+          <p:nvPr/>
+        </p:nvSpPr>
+        <p:spPr>
+          <a:xfrm>
+            <a:off x="1318115" y="4263707"/>
+            <a:ext cx="4335628" cy="292608"/>
+          </a:xfrm>
+          <a:prstGeom prst="rect">
+            <a:avLst/>
+          </a:prstGeom>
+          <a:noFill/>
+          <a:ln/>
+        </p:spPr>
+        <p:txBody>
+          <a:bodyPr wrap="square" lIns="0" tIns="0" rIns="0" bIns="0" rtlCol="0" anchor="ctr"/>
+          <a:lstStyle/>
+          <a:p>
+            <a:pPr marL="0" indent="0">
+              <a:buNone/>
+            </a:pPr>
+            <a:r>
+              <a:rPr lang="en-US" sz="1500" b="1" dirty="0">
+                <a:solidFill>
+                  <a:srgbClr val="1A1A2E"/>
+                </a:solidFill>
+                <a:latin typeface="Cambria" pitchFamily="34" charset="0"/>
+                <a:ea typeface="Cambria" pitchFamily="34" charset="-122"/>
+                <a:cs typeface="Cambria" pitchFamily="34" charset="-120"/>
+              </a:rPr>
+              <a:t>Feature Types</a:t>
+            </a:r>
+            <a:endParaRPr lang="en-US" sz="1500" dirty="0"/>
+          </a:p>
+        </p:txBody>
+      </p:sp>
+      <p:sp>
+        <p:nvSpPr>
+          <p:cNvPr id="23" name="Text 21"/>
+          <p:cNvSpPr/>
+          <p:nvPr/>
+        </p:nvSpPr>
+        <p:spPr>
+          <a:xfrm>
+            <a:off x="822960" y="4873752"/>
+            <a:ext cx="4838548" cy="384048"/>
+          </a:xfrm>
+          <a:prstGeom prst="rect">
+            <a:avLst/>
+          </a:prstGeom>
+          <a:noFill/>
+          <a:ln/>
+        </p:spPr>
+        <p:txBody>
+          <a:bodyPr wrap="square" lIns="0" tIns="0" rIns="0" bIns="0" rtlCol="0" anchor="ctr"/>
+          <a:lstStyle/>
+          <a:p>
+            <a:r>
+              <a:rPr lang="en-US" sz="2200" b="1" dirty="0">
+                <a:solidFill>
+                  <a:srgbClr val="1E2761"/>
                 </a:solidFill>
                 <a:latin typeface="Calibri" pitchFamily="34" charset="0"/>
                 <a:ea typeface="Calibri" pitchFamily="34" charset="-122"/>
                 <a:cs typeface="Calibri" pitchFamily="34" charset="-120"/>
               </a:rPr>
-              <a:t>Present? Which column(s)?</a:t>
-            </a:r>
-            <a:endParaRPr lang="en-US" sz="1050" dirty="0"/>
-          </a:p>
-        </p:txBody>
-      </p:sp>
-      <p:sp>
-        <p:nvSpPr>
-          <p:cNvPr id="29" name="Text 27"/>
-          <p:cNvSpPr/>
-          <p:nvPr/>
-        </p:nvSpPr>
-        <p:spPr>
-          <a:xfrm>
-            <a:off x="6530188" y="4873752"/>
-            <a:ext cx="4838548" cy="384048"/>
+              <a:t>4 Categorical / 12 numerical </a:t>
+            </a:r>
+            <a:endParaRPr lang="en-US" sz="2200" dirty="0"/>
+          </a:p>
+        </p:txBody>
+      </p:sp>
+      <p:sp>
+        <p:nvSpPr>
+          <p:cNvPr id="25" name="Shape 23"/>
+          <p:cNvSpPr/>
+          <p:nvPr/>
+        </p:nvSpPr>
+        <p:spPr>
+          <a:xfrm>
+            <a:off x="6397600" y="4218889"/>
+            <a:ext cx="384048" cy="384048"/>
+          </a:xfrm>
+          <a:prstGeom prst="roundRect">
+            <a:avLst>
+              <a:gd name="adj" fmla="val 119048"/>
+            </a:avLst>
+          </a:prstGeom>
+          <a:solidFill>
+            <a:srgbClr val="1E2761"/>
+          </a:solidFill>
+          <a:ln/>
+        </p:spPr>
+        <p:txBody>
+          <a:bodyPr/>
+          <a:lstStyle/>
+          <a:p>
+            <a:endParaRPr lang="en-BH" dirty="0"/>
+          </a:p>
+        </p:txBody>
+      </p:sp>
+      <p:sp>
+        <p:nvSpPr>
+          <p:cNvPr id="26" name="Text 24"/>
+          <p:cNvSpPr/>
+          <p:nvPr/>
+        </p:nvSpPr>
+        <p:spPr>
+          <a:xfrm>
+            <a:off x="6400608" y="4218889"/>
+            <a:ext cx="384048" cy="384048"/>
+          </a:xfrm>
+          <a:prstGeom prst="rect">
+            <a:avLst/>
+          </a:prstGeom>
+          <a:noFill/>
+          <a:ln/>
+        </p:spPr>
+        <p:txBody>
+          <a:bodyPr wrap="square" lIns="0" tIns="0" rIns="0" bIns="0" rtlCol="0" anchor="ctr"/>
+          <a:lstStyle/>
+          <a:p>
+            <a:pPr marL="0" indent="0" algn="ctr">
+              <a:buNone/>
+            </a:pPr>
+            <a:r>
+              <a:rPr lang="en-US" sz="1400" b="1" dirty="0">
+                <a:solidFill>
+                  <a:srgbClr val="FFFFFF"/>
+                </a:solidFill>
+                <a:latin typeface="Cambria" pitchFamily="34" charset="0"/>
+                <a:ea typeface="Cambria" pitchFamily="34" charset="-122"/>
+                <a:cs typeface="Cambria" pitchFamily="34" charset="-120"/>
+              </a:rPr>
+              <a:t>4</a:t>
+            </a:r>
+            <a:endParaRPr lang="en-US" sz="1400" dirty="0"/>
+          </a:p>
+        </p:txBody>
+      </p:sp>
+      <p:sp>
+        <p:nvSpPr>
+          <p:cNvPr id="27" name="Text 25"/>
+          <p:cNvSpPr/>
+          <p:nvPr/>
+        </p:nvSpPr>
+        <p:spPr>
+          <a:xfrm>
+            <a:off x="6931152" y="4249799"/>
+            <a:ext cx="4335628" cy="292608"/>
+          </a:xfrm>
+          <a:prstGeom prst="rect">
+            <a:avLst/>
+          </a:prstGeom>
+          <a:noFill/>
+          <a:ln/>
+        </p:spPr>
+        <p:txBody>
+          <a:bodyPr wrap="square" lIns="0" tIns="0" rIns="0" bIns="0" rtlCol="0" anchor="ctr"/>
+          <a:lstStyle/>
+          <a:p>
+            <a:pPr marL="0" indent="0">
+              <a:buNone/>
+            </a:pPr>
+            <a:r>
+              <a:rPr lang="en-US" sz="1500" b="1" dirty="0">
+                <a:solidFill>
+                  <a:srgbClr val="1A1A2E"/>
+                </a:solidFill>
+                <a:latin typeface="Cambria" pitchFamily="34" charset="0"/>
+                <a:ea typeface="Cambria" pitchFamily="34" charset="-122"/>
+                <a:cs typeface="Cambria" pitchFamily="34" charset="-120"/>
+              </a:rPr>
+              <a:t>Outliers</a:t>
+            </a:r>
+            <a:endParaRPr lang="en-US" sz="1500" dirty="0"/>
+          </a:p>
+        </p:txBody>
+      </p:sp>
+      <p:sp>
+        <p:nvSpPr>
+          <p:cNvPr id="30" name="Text 28"/>
+          <p:cNvSpPr/>
+          <p:nvPr/>
+        </p:nvSpPr>
+        <p:spPr>
+          <a:xfrm>
+            <a:off x="548640" y="6473952"/>
+            <a:ext cx="4572000" cy="274320"/>
           </a:xfrm>
           <a:prstGeom prst="rect">
             <a:avLst/>
@@ -3310,42 +3316,42 @@
               <a:buNone/>
             </a:pPr>
             <a:r>
-              <a:rPr lang="en-US" sz="2200" b="1" dirty="0">
-                <a:solidFill>
-                  <a:srgbClr val="1E2761"/>
+              <a:rPr lang="en-US" sz="900" dirty="0">
+                <a:solidFill>
+                  <a:srgbClr val="6B7280"/>
                 </a:solidFill>
                 <a:latin typeface="Calibri" pitchFamily="34" charset="0"/>
                 <a:ea typeface="Calibri" pitchFamily="34" charset="-122"/>
                 <a:cs typeface="Calibri" pitchFamily="34" charset="-120"/>
               </a:rPr>
-              <a:t>[ ? ]</a:t>
-            </a:r>
-            <a:endParaRPr lang="en-US" sz="2200" dirty="0"/>
-          </a:p>
-        </p:txBody>
-      </p:sp>
-      <p:sp>
-        <p:nvSpPr>
-          <p:cNvPr id="30" name="Text 28"/>
-          <p:cNvSpPr/>
-          <p:nvPr/>
-        </p:nvSpPr>
-        <p:spPr>
-          <a:xfrm>
-            <a:off x="548640" y="6473952"/>
-            <a:ext cx="4572000" cy="274320"/>
-          </a:xfrm>
-          <a:prstGeom prst="rect">
-            <a:avLst/>
-          </a:prstGeom>
-          <a:noFill/>
-          <a:ln/>
-        </p:spPr>
-        <p:txBody>
-          <a:bodyPr wrap="square" lIns="0" tIns="0" rIns="0" bIns="0" rtlCol="0" anchor="ctr"/>
-          <a:lstStyle/>
-          <a:p>
-            <a:pPr marL="0" indent="0" algn="l">
+              <a:t>Capstone Dataset Proposal</a:t>
+            </a:r>
+            <a:endParaRPr lang="en-US" sz="900" dirty="0"/>
+          </a:p>
+        </p:txBody>
+      </p:sp>
+      <p:sp>
+        <p:nvSpPr>
+          <p:cNvPr id="31" name="Text 29"/>
+          <p:cNvSpPr/>
+          <p:nvPr/>
+        </p:nvSpPr>
+        <p:spPr>
+          <a:xfrm>
+            <a:off x="8899855" y="6473952"/>
+            <a:ext cx="2743200" cy="274320"/>
+          </a:xfrm>
+          <a:prstGeom prst="rect">
+            <a:avLst/>
+          </a:prstGeom>
+          <a:noFill/>
+          <a:ln/>
+        </p:spPr>
+        <p:txBody>
+          <a:bodyPr wrap="square" lIns="0" tIns="0" rIns="0" bIns="0" rtlCol="0" anchor="ctr"/>
+          <a:lstStyle/>
+          <a:p>
+            <a:pPr marL="0" indent="0" algn="r">
               <a:buNone/>
             </a:pPr>
             <a:r>
@@ -3357,7 +3363,7 @@
                 <a:ea typeface="Calibri" pitchFamily="34" charset="-122"/>
                 <a:cs typeface="Calibri" pitchFamily="34" charset="-120"/>
               </a:rPr>
-              <a:t>Capstone Dataset Proposal</a:t>
+              <a:t>Topic 1 — EDA Findings</a:t>
             </a:r>
             <a:endParaRPr lang="en-US" sz="900" dirty="0"/>
           </a:p>
@@ -3365,30 +3371,36 @@
       </p:sp>
       <p:sp>
         <p:nvSpPr>
-          <p:cNvPr id="31" name="Text 29"/>
-          <p:cNvSpPr/>
-          <p:nvPr/>
-        </p:nvSpPr>
-        <p:spPr>
-          <a:xfrm>
-            <a:off x="8899855" y="6473952"/>
-            <a:ext cx="2743200" cy="274320"/>
-          </a:xfrm>
-          <a:prstGeom prst="rect">
-            <a:avLst/>
-          </a:prstGeom>
-          <a:noFill/>
-          <a:ln/>
-        </p:spPr>
-        <p:txBody>
-          <a:bodyPr wrap="square" lIns="0" tIns="0" rIns="0" bIns="0" rtlCol="0" anchor="ctr"/>
-          <a:lstStyle/>
-          <a:p>
-            <a:pPr marL="0" indent="0" algn="r">
-              <a:buNone/>
-            </a:pPr>
-            <a:r>
-              <a:rPr lang="en-US" sz="900" dirty="0">
+          <p:cNvPr id="32" name="Text 8">
+            <a:extLst>
+              <a:ext uri="{FF2B5EF4-FFF2-40B4-BE49-F238E27FC236}">
+                <a16:creationId xmlns:a16="http://schemas.microsoft.com/office/drawing/2014/main" id="{59CB92D5-4861-B45A-6677-8422D5EA3516}"/>
+              </a:ext>
+            </a:extLst>
+          </p:cNvPr>
+          <p:cNvSpPr/>
+          <p:nvPr/>
+        </p:nvSpPr>
+        <p:spPr>
+          <a:xfrm>
+            <a:off x="1325880" y="2400300"/>
+            <a:ext cx="4335628" cy="365760"/>
+          </a:xfrm>
+          <a:prstGeom prst="rect">
+            <a:avLst/>
+          </a:prstGeom>
+          <a:noFill/>
+          <a:ln/>
+        </p:spPr>
+        <p:txBody>
+          <a:bodyPr wrap="square" lIns="0" tIns="0" rIns="0" bIns="0" rtlCol="0" anchor="t"/>
+          <a:lstStyle/>
+          <a:p>
+            <a:pPr marL="0" indent="0">
+              <a:buNone/>
+            </a:pPr>
+            <a:r>
+              <a:rPr lang="en-US" sz="1050" dirty="0">
                 <a:solidFill>
                   <a:srgbClr val="6B7280"/>
                 </a:solidFill>
@@ -3396,9 +3408,151 @@
                 <a:ea typeface="Calibri" pitchFamily="34" charset="-122"/>
                 <a:cs typeface="Calibri" pitchFamily="34" charset="-120"/>
               </a:rPr>
-              <a:t>Topic 1 — EDA Findings</a:t>
-            </a:r>
-            <a:endParaRPr lang="en-US" sz="900" dirty="0"/>
+              <a:t>Regression or Classification?</a:t>
+            </a:r>
+            <a:endParaRPr lang="en-US" sz="1050" dirty="0"/>
+          </a:p>
+        </p:txBody>
+      </p:sp>
+      <p:sp>
+        <p:nvSpPr>
+          <p:cNvPr id="33" name="TextBox 32">
+            <a:extLst>
+              <a:ext uri="{FF2B5EF4-FFF2-40B4-BE49-F238E27FC236}">
+                <a16:creationId xmlns:a16="http://schemas.microsoft.com/office/drawing/2014/main" id="{2C334CE2-FEFE-A7B7-F52F-6B884B775C84}"/>
+              </a:ext>
+            </a:extLst>
+          </p:cNvPr>
+          <p:cNvSpPr txBox="1"/>
+          <p:nvPr/>
+        </p:nvSpPr>
+        <p:spPr>
+          <a:xfrm>
+            <a:off x="6372991" y="2357342"/>
+            <a:ext cx="4995745" cy="2708434"/>
+          </a:xfrm>
+          <a:prstGeom prst="rect">
+            <a:avLst/>
+          </a:prstGeom>
+          <a:noFill/>
+        </p:spPr>
+        <p:txBody>
+          <a:bodyPr wrap="square" rtlCol="0">
+            <a:spAutoFit/>
+          </a:bodyPr>
+          <a:lstStyle/>
+          <a:p>
+            <a:pPr latinLnBrk="1"/>
+            <a:r>
+              <a:rPr lang="en-BH" sz="1600" dirty="0"/>
+              <a:t>Months since last delinquent  - 53655</a:t>
+            </a:r>
+          </a:p>
+          <a:p>
+            <a:pPr latinLnBrk="1"/>
+            <a:r>
+              <a:rPr lang="en-BH" sz="1600" dirty="0"/>
+              <a:t>Bankruptcies   - 718</a:t>
+            </a:r>
+          </a:p>
+          <a:p>
+            <a:pPr latinLnBrk="1"/>
+            <a:r>
+              <a:rPr lang="en-BH" sz="1600" dirty="0"/>
+              <a:t>Tax Liens   - 524</a:t>
+            </a:r>
+          </a:p>
+          <a:p>
+            <a:pPr latinLnBrk="1"/>
+            <a:r>
+              <a:rPr lang="en-BH" sz="1600" dirty="0"/>
+              <a:t>Maximum Open Credit  - 516</a:t>
+            </a:r>
+          </a:p>
+          <a:p>
+            <a:pPr latinLnBrk="1"/>
+            <a:r>
+              <a:rPr lang="en-BH" sz="1600" dirty="0"/>
+              <a:t>Credit Score / Annual Income (19,154, co-missing)</a:t>
+            </a:r>
+          </a:p>
+          <a:p>
+            <a:br>
+              <a:rPr lang="en-BH" sz="1600" dirty="0"/>
+            </a:br>
+            <a:endParaRPr lang="en-BH" sz="1600" dirty="0"/>
+          </a:p>
+          <a:p>
+            <a:pPr latinLnBrk="1"/>
+            <a:endParaRPr lang="en-BH" dirty="0"/>
+          </a:p>
+          <a:p>
+            <a:br>
+              <a:rPr lang="en-BH" dirty="0"/>
+            </a:br>
+            <a:endParaRPr lang="en-BH" dirty="0"/>
+          </a:p>
+        </p:txBody>
+      </p:sp>
+      <p:sp>
+        <p:nvSpPr>
+          <p:cNvPr id="37" name="TextBox 36">
+            <a:extLst>
+              <a:ext uri="{FF2B5EF4-FFF2-40B4-BE49-F238E27FC236}">
+                <a16:creationId xmlns:a16="http://schemas.microsoft.com/office/drawing/2014/main" id="{696E45D5-0E7F-9346-E2F7-6F66C6579036}"/>
+              </a:ext>
+            </a:extLst>
+          </p:cNvPr>
+          <p:cNvSpPr txBox="1"/>
+          <p:nvPr/>
+        </p:nvSpPr>
+        <p:spPr>
+          <a:xfrm>
+            <a:off x="6589624" y="4556315"/>
+            <a:ext cx="5096031" cy="1169551"/>
+          </a:xfrm>
+          <a:prstGeom prst="rect">
+            <a:avLst/>
+          </a:prstGeom>
+          <a:noFill/>
+        </p:spPr>
+        <p:txBody>
+          <a:bodyPr wrap="square" rtlCol="0">
+            <a:spAutoFit/>
+          </a:bodyPr>
+          <a:lstStyle/>
+          <a:p>
+            <a:pPr lvl="0"/>
+            <a:r>
+              <a:rPr lang="en-BH" sz="1400" b="1" dirty="0"/>
+              <a:t>Sentinel value:</a:t>
+            </a:r>
+            <a:r>
+              <a:rPr lang="en-BH" sz="1400" dirty="0"/>
+              <a:t> Current Loan Amount max = 99,999,999 </a:t>
+            </a:r>
+          </a:p>
+          <a:p>
+            <a:pPr lvl="0"/>
+            <a:r>
+              <a:rPr lang="en-BH" sz="1400" b="1" dirty="0"/>
+              <a:t>Invalid range:</a:t>
+            </a:r>
+            <a:r>
+              <a:rPr lang="en-BH" sz="1400" dirty="0"/>
+              <a:t> Credit Score max = 7,510 (real cap is 850)</a:t>
+            </a:r>
+          </a:p>
+          <a:p>
+            <a:pPr lvl="0"/>
+            <a:r>
+              <a:rPr lang="en-BH" sz="1400" b="1" dirty="0"/>
+              <a:t>Large gap between mean and max:</a:t>
+            </a:r>
+            <a:r>
+              <a:rPr lang="en-BH" sz="1400" dirty="0"/>
+              <a:t> Annual Income — mean $1.38M vs. max $165M, Maximum Open Credit mean far below its max</a:t>
+            </a:r>
           </a:p>
         </p:txBody>
       </p:sp>
@@ -3524,9 +3678,6 @@
           <a:bodyPr wrap="square" lIns="0" tIns="0" rIns="0" bIns="0" rtlCol="0" anchor="ctr"/>
           <a:lstStyle/>
           <a:p>
-            <a:pPr marL="0" indent="0">
-              <a:buNone/>
-            </a:pPr>
             <a:r>
               <a:rPr lang="en-US" sz="3000" b="1" dirty="0">
                 <a:solidFill>
@@ -3536,7 +3687,7 @@
                 <a:ea typeface="Cambria" pitchFamily="34" charset="-122"/>
                 <a:cs typeface="Cambria" pitchFamily="34" charset="-120"/>
               </a:rPr>
-              <a:t>[ Dataset / Topic Name ]</a:t>
+              <a:t>Credit score classification </a:t>
             </a:r>
             <a:endParaRPr lang="en-US" sz="3000" dirty="0"/>
           </a:p>
@@ -3566,17 +3717,6 @@
             <a:pPr marL="0" indent="0">
               <a:buNone/>
             </a:pPr>
-            <a:r>
-              <a:rPr lang="en-US" sz="1200" i="1" dirty="0">
-                <a:solidFill>
-                  <a:srgbClr val="6B7280"/>
-                </a:solidFill>
-                <a:latin typeface="Calibri" pitchFamily="34" charset="0"/>
-                <a:ea typeface="Calibri" pitchFamily="34" charset="-122"/>
-                <a:cs typeface="Calibri" pitchFamily="34" charset="-120"/>
-              </a:rPr>
-              <a:t>[ 1-line source / dataset tag ]</a:t>
-            </a:r>
             <a:endParaRPr lang="en-US" sz="1200" dirty="0"/>
           </a:p>
         </p:txBody>
@@ -3780,17 +3920,6 @@
             <a:pPr marL="0" indent="0" algn="ctr">
               <a:buNone/>
             </a:pPr>
-            <a:r>
-              <a:rPr lang="en-US" sz="1200" i="1" dirty="0">
-                <a:solidFill>
-                  <a:srgbClr val="6B7280"/>
-                </a:solidFill>
-                <a:latin typeface="Calibri" pitchFamily="34" charset="0"/>
-                <a:ea typeface="Calibri" pitchFamily="34" charset="-122"/>
-                <a:cs typeface="Calibri" pitchFamily="34" charset="-120"/>
-              </a:rPr>
-              <a:t>[ Describe the business / real-world problem this topic addresses ]</a:t>
-            </a:r>
             <a:endParaRPr lang="en-US" sz="1200" dirty="0"/>
           </a:p>
         </p:txBody>
@@ -3989,8 +4118,36 @@
             <a:pPr marL="0" indent="0" algn="ctr">
               <a:buNone/>
             </a:pPr>
-            <a:r>
-              <a:rPr lang="en-US" sz="1200" i="1" dirty="0">
+            <a:endParaRPr lang="en-US" sz="1200" dirty="0"/>
+          </a:p>
+        </p:txBody>
+      </p:sp>
+      <p:sp>
+        <p:nvSpPr>
+          <p:cNvPr id="18" name="Text 16"/>
+          <p:cNvSpPr/>
+          <p:nvPr/>
+        </p:nvSpPr>
+        <p:spPr>
+          <a:xfrm>
+            <a:off x="548640" y="6473952"/>
+            <a:ext cx="4572000" cy="274320"/>
+          </a:xfrm>
+          <a:prstGeom prst="rect">
+            <a:avLst/>
+          </a:prstGeom>
+          <a:noFill/>
+          <a:ln/>
+        </p:spPr>
+        <p:txBody>
+          <a:bodyPr wrap="square" lIns="0" tIns="0" rIns="0" bIns="0" rtlCol="0" anchor="ctr"/>
+          <a:lstStyle/>
+          <a:p>
+            <a:pPr marL="0" indent="0" algn="l">
+              <a:buNone/>
+            </a:pPr>
+            <a:r>
+              <a:rPr lang="en-US" sz="900" dirty="0">
                 <a:solidFill>
                   <a:srgbClr val="6B7280"/>
                 </a:solidFill>
@@ -3998,34 +4155,34 @@
                 <a:ea typeface="Calibri" pitchFamily="34" charset="-122"/>
                 <a:cs typeface="Calibri" pitchFamily="34" charset="-120"/>
               </a:rPr>
-              <a:t>[ What are you trying to predict / achieve? ]</a:t>
-            </a:r>
-            <a:endParaRPr lang="en-US" sz="1200" dirty="0"/>
-          </a:p>
-        </p:txBody>
-      </p:sp>
-      <p:sp>
-        <p:nvSpPr>
-          <p:cNvPr id="18" name="Text 16"/>
-          <p:cNvSpPr/>
-          <p:nvPr/>
-        </p:nvSpPr>
-        <p:spPr>
-          <a:xfrm>
-            <a:off x="548640" y="6473952"/>
-            <a:ext cx="4572000" cy="274320"/>
-          </a:xfrm>
-          <a:prstGeom prst="rect">
-            <a:avLst/>
-          </a:prstGeom>
-          <a:noFill/>
-          <a:ln/>
-        </p:spPr>
-        <p:txBody>
-          <a:bodyPr wrap="square" lIns="0" tIns="0" rIns="0" bIns="0" rtlCol="0" anchor="ctr"/>
-          <a:lstStyle/>
-          <a:p>
-            <a:pPr marL="0" indent="0" algn="l">
+              <a:t>Capstone Dataset Proposal</a:t>
+            </a:r>
+            <a:endParaRPr lang="en-US" sz="900" dirty="0"/>
+          </a:p>
+        </p:txBody>
+      </p:sp>
+      <p:sp>
+        <p:nvSpPr>
+          <p:cNvPr id="19" name="Text 17"/>
+          <p:cNvSpPr/>
+          <p:nvPr/>
+        </p:nvSpPr>
+        <p:spPr>
+          <a:xfrm>
+            <a:off x="8899855" y="6473952"/>
+            <a:ext cx="2743200" cy="274320"/>
+          </a:xfrm>
+          <a:prstGeom prst="rect">
+            <a:avLst/>
+          </a:prstGeom>
+          <a:noFill/>
+          <a:ln/>
+        </p:spPr>
+        <p:txBody>
+          <a:bodyPr wrap="square" lIns="0" tIns="0" rIns="0" bIns="0" rtlCol="0" anchor="ctr"/>
+          <a:lstStyle/>
+          <a:p>
+            <a:pPr marL="0" indent="0" algn="r">
               <a:buNone/>
             </a:pPr>
             <a:r>
@@ -4037,7 +4194,7 @@
                 <a:ea typeface="Calibri" pitchFamily="34" charset="-122"/>
                 <a:cs typeface="Calibri" pitchFamily="34" charset="-120"/>
               </a:rPr>
-              <a:t>Capstone Dataset Proposal</a:t>
+              <a:t>Topic 2 — Overview</a:t>
             </a:r>
             <a:endParaRPr lang="en-US" sz="900" dirty="0"/>
           </a:p>
@@ -4045,40 +4202,156 @@
       </p:sp>
       <p:sp>
         <p:nvSpPr>
-          <p:cNvPr id="19" name="Text 17"/>
-          <p:cNvSpPr/>
-          <p:nvPr/>
-        </p:nvSpPr>
-        <p:spPr>
-          <a:xfrm>
-            <a:off x="8899855" y="6473952"/>
-            <a:ext cx="2743200" cy="274320"/>
-          </a:xfrm>
-          <a:prstGeom prst="rect">
-            <a:avLst/>
-          </a:prstGeom>
-          <a:noFill/>
-          <a:ln/>
-        </p:spPr>
-        <p:txBody>
-          <a:bodyPr wrap="square" lIns="0" tIns="0" rIns="0" bIns="0" rtlCol="0" anchor="ctr"/>
-          <a:lstStyle/>
-          <a:p>
-            <a:pPr marL="0" indent="0" algn="r">
-              <a:buNone/>
-            </a:pPr>
-            <a:r>
-              <a:rPr lang="en-US" sz="900" dirty="0">
-                <a:solidFill>
-                  <a:srgbClr val="6B7280"/>
-                </a:solidFill>
-                <a:latin typeface="Calibri" pitchFamily="34" charset="0"/>
-                <a:ea typeface="Calibri" pitchFamily="34" charset="-122"/>
-                <a:cs typeface="Calibri" pitchFamily="34" charset="-120"/>
-              </a:rPr>
-              <a:t>Topic 2 — Overview</a:t>
-            </a:r>
-            <a:endParaRPr lang="en-US" sz="900" dirty="0"/>
+          <p:cNvPr id="20" name="TextBox 19">
+            <a:extLst>
+              <a:ext uri="{FF2B5EF4-FFF2-40B4-BE49-F238E27FC236}">
+                <a16:creationId xmlns:a16="http://schemas.microsoft.com/office/drawing/2014/main" id="{D80BD357-4821-3CC8-FDF2-BF146F3C0F43}"/>
+              </a:ext>
+            </a:extLst>
+          </p:cNvPr>
+          <p:cNvSpPr txBox="1"/>
+          <p:nvPr/>
+        </p:nvSpPr>
+        <p:spPr>
+          <a:xfrm>
+            <a:off x="1120140" y="3064256"/>
+            <a:ext cx="5153660" cy="2031325"/>
+          </a:xfrm>
+          <a:prstGeom prst="rect">
+            <a:avLst/>
+          </a:prstGeom>
+          <a:noFill/>
+        </p:spPr>
+        <p:txBody>
+          <a:bodyPr wrap="square" rtlCol="0">
+            <a:spAutoFit/>
+          </a:bodyPr>
+          <a:lstStyle/>
+          <a:p>
+            <a:pPr marL="285750" lvl="0" indent="-285750">
+              <a:buFont typeface="Arial" panose="020B0604020202020204" pitchFamily="34" charset="0"/>
+              <a:buChar char="•"/>
+            </a:pPr>
+            <a:r>
+              <a:rPr lang="en-BH" dirty="0"/>
+              <a:t>Financial institutions need a reliable, scalable way to categorize customers into credit risk tiers</a:t>
+            </a:r>
+          </a:p>
+          <a:p>
+            <a:pPr marL="285750" lvl="0" indent="-285750">
+              <a:buFont typeface="Arial" panose="020B0604020202020204" pitchFamily="34" charset="0"/>
+              <a:buChar char="•"/>
+            </a:pPr>
+            <a:r>
+              <a:rPr lang="en-BH" dirty="0"/>
+              <a:t>Underlying data used for this is often messy and inconsistent</a:t>
+            </a:r>
+          </a:p>
+          <a:p>
+            <a:pPr marL="285750" lvl="0" indent="-285750">
+              <a:buFont typeface="Arial" panose="020B0604020202020204" pitchFamily="34" charset="0"/>
+              <a:buChar char="•"/>
+            </a:pPr>
+            <a:r>
+              <a:rPr lang="en-BH" dirty="0"/>
+              <a:t>This project predicts a customer's credit score category — </a:t>
+            </a:r>
+            <a:r>
+              <a:rPr lang="en-BH" b="1" dirty="0"/>
+              <a:t>Poor</a:t>
+            </a:r>
+            <a:r>
+              <a:rPr lang="en-BH" dirty="0"/>
+              <a:t>, </a:t>
+            </a:r>
+            <a:r>
+              <a:rPr lang="en-BH" b="1" dirty="0"/>
+              <a:t>Standard</a:t>
+            </a:r>
+            <a:r>
+              <a:rPr lang="en-BH" dirty="0"/>
+              <a:t>, or </a:t>
+            </a:r>
+            <a:r>
+              <a:rPr lang="en-BH" b="1" dirty="0"/>
+              <a:t>Good</a:t>
+            </a:r>
+            <a:r>
+              <a:rPr lang="en-BH" dirty="0"/>
+              <a:t> — from financial and behavioral data</a:t>
+            </a:r>
+          </a:p>
+        </p:txBody>
+      </p:sp>
+      <p:sp>
+        <p:nvSpPr>
+          <p:cNvPr id="21" name="TextBox 20">
+            <a:extLst>
+              <a:ext uri="{FF2B5EF4-FFF2-40B4-BE49-F238E27FC236}">
+                <a16:creationId xmlns:a16="http://schemas.microsoft.com/office/drawing/2014/main" id="{B9F2429E-A41B-201C-8ECD-B1BE782355E6}"/>
+              </a:ext>
+            </a:extLst>
+          </p:cNvPr>
+          <p:cNvSpPr txBox="1"/>
+          <p:nvPr/>
+        </p:nvSpPr>
+        <p:spPr>
+          <a:xfrm>
+            <a:off x="7594600" y="3401568"/>
+            <a:ext cx="3619500" cy="2031325"/>
+          </a:xfrm>
+          <a:prstGeom prst="rect">
+            <a:avLst/>
+          </a:prstGeom>
+          <a:noFill/>
+        </p:spPr>
+        <p:txBody>
+          <a:bodyPr wrap="square" rtlCol="0">
+            <a:spAutoFit/>
+          </a:bodyPr>
+          <a:lstStyle/>
+          <a:p>
+            <a:r>
+              <a:rPr lang="en-BH" b="1" dirty="0">
+                <a:solidFill>
+                  <a:schemeClr val="bg2"/>
+                </a:solidFill>
+              </a:rPr>
+              <a:t>1-</a:t>
+            </a:r>
+            <a:r>
+              <a:rPr lang="en-BH" dirty="0">
+                <a:solidFill>
+                  <a:schemeClr val="bg2"/>
+                </a:solidFill>
+              </a:rPr>
+              <a:t> Build a multi-class classifier to categorize customers into credit score tiers</a:t>
+            </a:r>
+          </a:p>
+          <a:p>
+            <a:endParaRPr lang="en-BH" dirty="0">
+              <a:solidFill>
+                <a:schemeClr val="bg2"/>
+              </a:solidFill>
+            </a:endParaRPr>
+          </a:p>
+          <a:p>
+            <a:r>
+              <a:rPr lang="en-BH" b="1" dirty="0">
+                <a:solidFill>
+                  <a:schemeClr val="bg2"/>
+                </a:solidFill>
+              </a:rPr>
+              <a:t>2-</a:t>
+            </a:r>
+            <a:r>
+              <a:rPr lang="en-BH" dirty="0">
+                <a:solidFill>
+                  <a:schemeClr val="bg2"/>
+                </a:solidFill>
+              </a:rPr>
+              <a:t> Determine which financial behaviors most strongly predict credit score category</a:t>
+            </a:r>
           </a:p>
         </p:txBody>
       </p:sp>
@@ -4255,7 +4528,7 @@
                 <a:ea typeface="Calibri" pitchFamily="34" charset="-122"/>
                 <a:cs typeface="Calibri" pitchFamily="34" charset="-120"/>
               </a:rPr>
-              <a:t>[ Dataset / Topic Name ]</a:t>
+              <a:t>Credit Score Classification</a:t>
             </a:r>
             <a:endParaRPr lang="en-US" sz="1200" dirty="0"/>
           </a:p>
@@ -4371,7 +4644,7 @@
         </p:nvSpPr>
         <p:spPr>
           <a:xfrm>
-            <a:off x="1325880" y="2139696"/>
+            <a:off x="1325880" y="2229914"/>
             <a:ext cx="4335628" cy="292608"/>
           </a:xfrm>
           <a:prstGeom prst="rect">
@@ -4426,57 +4699,7 @@
             <a:pPr marL="0" indent="0">
               <a:buNone/>
             </a:pPr>
-            <a:r>
-              <a:rPr lang="en-US" sz="1050" dirty="0">
-                <a:solidFill>
-                  <a:srgbClr val="6B7280"/>
-                </a:solidFill>
-                <a:latin typeface="Calibri" pitchFamily="34" charset="0"/>
-                <a:ea typeface="Calibri" pitchFamily="34" charset="-122"/>
-                <a:cs typeface="Calibri" pitchFamily="34" charset="-120"/>
-              </a:rPr>
-              <a:t>Regression or Classification?</a:t>
-            </a:r>
             <a:endParaRPr lang="en-US" sz="1050" dirty="0"/>
-          </a:p>
-        </p:txBody>
-      </p:sp>
-      <p:sp>
-        <p:nvSpPr>
-          <p:cNvPr id="11" name="Text 9"/>
-          <p:cNvSpPr/>
-          <p:nvPr/>
-        </p:nvSpPr>
-        <p:spPr>
-          <a:xfrm>
-            <a:off x="822960" y="2953512"/>
-            <a:ext cx="4838548" cy="384048"/>
-          </a:xfrm>
-          <a:prstGeom prst="rect">
-            <a:avLst/>
-          </a:prstGeom>
-          <a:noFill/>
-          <a:ln/>
-        </p:spPr>
-        <p:txBody>
-          <a:bodyPr wrap="square" lIns="0" tIns="0" rIns="0" bIns="0" rtlCol="0" anchor="ctr"/>
-          <a:lstStyle/>
-          <a:p>
-            <a:pPr marL="0" indent="0" algn="l">
-              <a:buNone/>
-            </a:pPr>
-            <a:r>
-              <a:rPr lang="en-US" sz="2200" b="1" dirty="0">
-                <a:solidFill>
-                  <a:srgbClr val="1E2761"/>
-                </a:solidFill>
-                <a:latin typeface="Calibri" pitchFamily="34" charset="0"/>
-                <a:ea typeface="Calibri" pitchFamily="34" charset="-122"/>
-                <a:cs typeface="Calibri" pitchFamily="34" charset="-120"/>
-              </a:rPr>
-              <a:t>[ ? ]</a:t>
-            </a:r>
-            <a:endParaRPr lang="en-US" sz="2200" dirty="0"/>
           </a:p>
         </p:txBody>
       </p:sp>
@@ -4590,7 +4813,7 @@
         </p:nvSpPr>
         <p:spPr>
           <a:xfrm>
-            <a:off x="7033108" y="2139696"/>
+            <a:off x="7033108" y="2217420"/>
             <a:ext cx="4335628" cy="292608"/>
           </a:xfrm>
           <a:prstGeom prst="rect">
@@ -4645,47 +4868,44 @@
             <a:pPr marL="0" indent="0">
               <a:buNone/>
             </a:pPr>
-            <a:r>
-              <a:rPr lang="en-US" sz="1050" dirty="0">
-                <a:solidFill>
-                  <a:srgbClr val="6B7280"/>
+            <a:endParaRPr lang="en-US" sz="1050" dirty="0"/>
+          </a:p>
+        </p:txBody>
+      </p:sp>
+      <p:sp>
+        <p:nvSpPr>
+          <p:cNvPr id="17" name="Text 15"/>
+          <p:cNvSpPr/>
+          <p:nvPr/>
+        </p:nvSpPr>
+        <p:spPr>
+          <a:xfrm>
+            <a:off x="6614006" y="2866390"/>
+            <a:ext cx="4838548" cy="384048"/>
+          </a:xfrm>
+          <a:prstGeom prst="rect">
+            <a:avLst/>
+          </a:prstGeom>
+          <a:noFill/>
+          <a:ln/>
+        </p:spPr>
+        <p:txBody>
+          <a:bodyPr wrap="square" lIns="0" tIns="0" rIns="0" bIns="0" rtlCol="0" anchor="ctr"/>
+          <a:lstStyle/>
+          <a:p>
+            <a:r>
+              <a:rPr lang="en-US" sz="1400" b="1" dirty="0" err="1">
+                <a:solidFill>
+                  <a:srgbClr val="1E2761"/>
                 </a:solidFill>
                 <a:latin typeface="Calibri" pitchFamily="34" charset="0"/>
                 <a:ea typeface="Calibri" pitchFamily="34" charset="-122"/>
                 <a:cs typeface="Calibri" pitchFamily="34" charset="-120"/>
               </a:rPr>
-              <a:t>Count / columns affected (or “none”)</a:t>
-            </a:r>
-            <a:endParaRPr lang="en-US" sz="1050" dirty="0"/>
-          </a:p>
-        </p:txBody>
-      </p:sp>
-      <p:sp>
-        <p:nvSpPr>
-          <p:cNvPr id="17" name="Text 15"/>
-          <p:cNvSpPr/>
-          <p:nvPr/>
-        </p:nvSpPr>
-        <p:spPr>
-          <a:xfrm>
-            <a:off x="6530188" y="2953512"/>
-            <a:ext cx="4838548" cy="384048"/>
-          </a:xfrm>
-          <a:prstGeom prst="rect">
-            <a:avLst/>
-          </a:prstGeom>
-          <a:noFill/>
-          <a:ln/>
-        </p:spPr>
-        <p:txBody>
-          <a:bodyPr wrap="square" lIns="0" tIns="0" rIns="0" bIns="0" rtlCol="0" anchor="ctr"/>
-          <a:lstStyle/>
-          <a:p>
-            <a:pPr marL="0" indent="0" algn="l">
-              <a:buNone/>
-            </a:pPr>
-            <a:r>
-              <a:rPr lang="en-US" sz="2200" b="1" dirty="0">
+              <a:t>Monthly_Inhand_Salary</a:t>
+            </a:r>
+            <a:r>
+              <a:rPr lang="en-US" sz="1400" b="1" dirty="0">
                 <a:solidFill>
                   <a:srgbClr val="1E2761"/>
                 </a:solidFill>
@@ -4693,9 +4913,266 @@
                 <a:ea typeface="Calibri" pitchFamily="34" charset="-122"/>
                 <a:cs typeface="Calibri" pitchFamily="34" charset="-120"/>
               </a:rPr>
-              <a:t>[ # ]</a:t>
-            </a:r>
-            <a:endParaRPr lang="en-US" sz="2200" dirty="0"/>
+              <a:t> - </a:t>
+            </a:r>
+            <a:r>
+              <a:rPr lang="en-US" sz="1400" dirty="0">
+                <a:solidFill>
+                  <a:srgbClr val="1E2761"/>
+                </a:solidFill>
+                <a:latin typeface="Calibri" pitchFamily="34" charset="0"/>
+                <a:ea typeface="Calibri" pitchFamily="34" charset="-122"/>
+                <a:cs typeface="Calibri" pitchFamily="34" charset="-120"/>
+              </a:rPr>
+              <a:t>15,002</a:t>
+            </a:r>
+            <a:r>
+              <a:rPr lang="en-US" sz="1400" b="1" dirty="0">
+                <a:solidFill>
+                  <a:srgbClr val="1E2761"/>
+                </a:solidFill>
+                <a:latin typeface="Calibri" pitchFamily="34" charset="0"/>
+                <a:ea typeface="Calibri" pitchFamily="34" charset="-122"/>
+                <a:cs typeface="Calibri" pitchFamily="34" charset="-120"/>
+              </a:rPr>
+              <a:t>  , </a:t>
+            </a:r>
+            <a:r>
+              <a:rPr lang="en-US" sz="1400" b="1" dirty="0" err="1">
+                <a:solidFill>
+                  <a:srgbClr val="1E2761"/>
+                </a:solidFill>
+                <a:latin typeface="Calibri" pitchFamily="34" charset="0"/>
+                <a:ea typeface="Calibri" pitchFamily="34" charset="-122"/>
+                <a:cs typeface="Calibri" pitchFamily="34" charset="-120"/>
+              </a:rPr>
+              <a:t>Type_of_Loan</a:t>
+            </a:r>
+            <a:r>
+              <a:rPr lang="en-US" sz="1400" b="1" dirty="0">
+                <a:solidFill>
+                  <a:srgbClr val="1E2761"/>
+                </a:solidFill>
+                <a:latin typeface="Calibri" pitchFamily="34" charset="0"/>
+                <a:ea typeface="Calibri" pitchFamily="34" charset="-122"/>
+                <a:cs typeface="Calibri" pitchFamily="34" charset="-120"/>
+              </a:rPr>
+              <a:t> - </a:t>
+            </a:r>
+            <a:r>
+              <a:rPr lang="en-US" sz="1400" dirty="0">
+                <a:solidFill>
+                  <a:srgbClr val="1E2761"/>
+                </a:solidFill>
+                <a:latin typeface="Calibri" pitchFamily="34" charset="0"/>
+                <a:ea typeface="Calibri" pitchFamily="34" charset="-122"/>
+                <a:cs typeface="Calibri" pitchFamily="34" charset="-120"/>
+              </a:rPr>
+              <a:t>11,408</a:t>
+            </a:r>
+          </a:p>
+          <a:p>
+            <a:r>
+              <a:rPr lang="en-US" sz="1400" b="1" dirty="0" err="1">
+                <a:solidFill>
+                  <a:srgbClr val="1E2761"/>
+                </a:solidFill>
+                <a:latin typeface="Calibri" pitchFamily="34" charset="0"/>
+                <a:ea typeface="Calibri" pitchFamily="34" charset="-122"/>
+                <a:cs typeface="Calibri" pitchFamily="34" charset="-120"/>
+              </a:rPr>
+              <a:t>Credit_History_Age</a:t>
+            </a:r>
+            <a:r>
+              <a:rPr lang="en-US" sz="1400" b="1" dirty="0">
+                <a:solidFill>
+                  <a:srgbClr val="1E2761"/>
+                </a:solidFill>
+                <a:latin typeface="Calibri" pitchFamily="34" charset="0"/>
+                <a:ea typeface="Calibri" pitchFamily="34" charset="-122"/>
+                <a:cs typeface="Calibri" pitchFamily="34" charset="-120"/>
+              </a:rPr>
+              <a:t> - </a:t>
+            </a:r>
+            <a:r>
+              <a:rPr lang="en-US" sz="1400" dirty="0">
+                <a:solidFill>
+                  <a:srgbClr val="1E2761"/>
+                </a:solidFill>
+                <a:latin typeface="Calibri" pitchFamily="34" charset="0"/>
+                <a:ea typeface="Calibri" pitchFamily="34" charset="-122"/>
+                <a:cs typeface="Calibri" pitchFamily="34" charset="-120"/>
+              </a:rPr>
+              <a:t>9,030</a:t>
+            </a:r>
+            <a:r>
+              <a:rPr lang="en-US" sz="1400" b="1" dirty="0">
+                <a:solidFill>
+                  <a:srgbClr val="1E2761"/>
+                </a:solidFill>
+                <a:latin typeface="Calibri" pitchFamily="34" charset="0"/>
+                <a:ea typeface="Calibri" pitchFamily="34" charset="-122"/>
+                <a:cs typeface="Calibri" pitchFamily="34" charset="-120"/>
+              </a:rPr>
+              <a:t>  , </a:t>
+            </a:r>
+            <a:r>
+              <a:rPr lang="en-US" sz="1400" b="1" dirty="0" err="1">
+                <a:solidFill>
+                  <a:srgbClr val="1E2761"/>
+                </a:solidFill>
+                <a:latin typeface="Calibri" pitchFamily="34" charset="0"/>
+                <a:ea typeface="Calibri" pitchFamily="34" charset="-122"/>
+                <a:cs typeface="Calibri" pitchFamily="34" charset="-120"/>
+              </a:rPr>
+              <a:t>Num_of_Delayed_Payment</a:t>
+            </a:r>
+            <a:r>
+              <a:rPr lang="en-US" sz="1400" b="1" dirty="0">
+                <a:solidFill>
+                  <a:srgbClr val="1E2761"/>
+                </a:solidFill>
+                <a:latin typeface="Calibri" pitchFamily="34" charset="0"/>
+                <a:ea typeface="Calibri" pitchFamily="34" charset="-122"/>
+                <a:cs typeface="Calibri" pitchFamily="34" charset="-120"/>
+              </a:rPr>
+              <a:t> - </a:t>
+            </a:r>
+            <a:r>
+              <a:rPr lang="en-US" sz="1400" dirty="0">
+                <a:solidFill>
+                  <a:srgbClr val="1E2761"/>
+                </a:solidFill>
+                <a:latin typeface="Calibri" pitchFamily="34" charset="0"/>
+                <a:ea typeface="Calibri" pitchFamily="34" charset="-122"/>
+                <a:cs typeface="Calibri" pitchFamily="34" charset="-120"/>
+              </a:rPr>
+              <a:t>7,002</a:t>
+            </a:r>
+          </a:p>
+          <a:p>
+            <a:r>
+              <a:rPr lang="en-US" sz="1400" b="1" dirty="0" err="1">
+                <a:solidFill>
+                  <a:srgbClr val="1E2761"/>
+                </a:solidFill>
+                <a:latin typeface="Calibri" pitchFamily="34" charset="0"/>
+                <a:ea typeface="Calibri" pitchFamily="34" charset="-122"/>
+                <a:cs typeface="Calibri" pitchFamily="34" charset="-120"/>
+              </a:rPr>
+              <a:t>Amount_invested_monthly</a:t>
+            </a:r>
+            <a:r>
+              <a:rPr lang="en-US" sz="1400" b="1" dirty="0">
+                <a:solidFill>
+                  <a:srgbClr val="1E2761"/>
+                </a:solidFill>
+                <a:latin typeface="Calibri" pitchFamily="34" charset="0"/>
+                <a:ea typeface="Calibri" pitchFamily="34" charset="-122"/>
+                <a:cs typeface="Calibri" pitchFamily="34" charset="-120"/>
+              </a:rPr>
+              <a:t> - </a:t>
+            </a:r>
+            <a:r>
+              <a:rPr lang="en-US" sz="1400" dirty="0">
+                <a:solidFill>
+                  <a:srgbClr val="1E2761"/>
+                </a:solidFill>
+                <a:latin typeface="Calibri" pitchFamily="34" charset="0"/>
+                <a:ea typeface="Calibri" pitchFamily="34" charset="-122"/>
+                <a:cs typeface="Calibri" pitchFamily="34" charset="-120"/>
+              </a:rPr>
+              <a:t>4,479</a:t>
+            </a:r>
+            <a:r>
+              <a:rPr lang="en-US" sz="1400" b="1" dirty="0">
+                <a:solidFill>
+                  <a:srgbClr val="1E2761"/>
+                </a:solidFill>
+                <a:latin typeface="Calibri" pitchFamily="34" charset="0"/>
+                <a:ea typeface="Calibri" pitchFamily="34" charset="-122"/>
+                <a:cs typeface="Calibri" pitchFamily="34" charset="-120"/>
+              </a:rPr>
+              <a:t>  , </a:t>
+            </a:r>
+            <a:r>
+              <a:rPr lang="en-US" sz="1400" b="1" dirty="0" err="1">
+                <a:solidFill>
+                  <a:srgbClr val="1E2761"/>
+                </a:solidFill>
+                <a:latin typeface="Calibri" pitchFamily="34" charset="0"/>
+                <a:ea typeface="Calibri" pitchFamily="34" charset="-122"/>
+                <a:cs typeface="Calibri" pitchFamily="34" charset="-120"/>
+              </a:rPr>
+              <a:t>Num_Credit_Inquiries</a:t>
+            </a:r>
+            <a:r>
+              <a:rPr lang="en-US" sz="1400" b="1" dirty="0">
+                <a:solidFill>
+                  <a:srgbClr val="1E2761"/>
+                </a:solidFill>
+                <a:latin typeface="Calibri" pitchFamily="34" charset="0"/>
+                <a:ea typeface="Calibri" pitchFamily="34" charset="-122"/>
+                <a:cs typeface="Calibri" pitchFamily="34" charset="-120"/>
+              </a:rPr>
+              <a:t> - </a:t>
+            </a:r>
+            <a:r>
+              <a:rPr lang="en-US" sz="1400" dirty="0">
+                <a:solidFill>
+                  <a:srgbClr val="1E2761"/>
+                </a:solidFill>
+                <a:latin typeface="Calibri" pitchFamily="34" charset="0"/>
+                <a:ea typeface="Calibri" pitchFamily="34" charset="-122"/>
+                <a:cs typeface="Calibri" pitchFamily="34" charset="-120"/>
+              </a:rPr>
+              <a:t>1,965</a:t>
+            </a:r>
+            <a:r>
+              <a:rPr lang="en-US" sz="1400" b="1" dirty="0">
+                <a:solidFill>
+                  <a:srgbClr val="1E2761"/>
+                </a:solidFill>
+                <a:latin typeface="Calibri" pitchFamily="34" charset="0"/>
+                <a:ea typeface="Calibri" pitchFamily="34" charset="-122"/>
+                <a:cs typeface="Calibri" pitchFamily="34" charset="-120"/>
+              </a:rPr>
+              <a:t>  , </a:t>
+            </a:r>
+            <a:r>
+              <a:rPr lang="en-US" sz="1400" b="1" dirty="0" err="1">
+                <a:solidFill>
+                  <a:srgbClr val="1E2761"/>
+                </a:solidFill>
+                <a:latin typeface="Calibri" pitchFamily="34" charset="0"/>
+                <a:ea typeface="Calibri" pitchFamily="34" charset="-122"/>
+                <a:cs typeface="Calibri" pitchFamily="34" charset="-120"/>
+              </a:rPr>
+              <a:t>Monthly_Balance</a:t>
+            </a:r>
+            <a:r>
+              <a:rPr lang="en-US" sz="1400" b="1" dirty="0">
+                <a:solidFill>
+                  <a:srgbClr val="1E2761"/>
+                </a:solidFill>
+                <a:latin typeface="Calibri" pitchFamily="34" charset="0"/>
+                <a:ea typeface="Calibri" pitchFamily="34" charset="-122"/>
+                <a:cs typeface="Calibri" pitchFamily="34" charset="-120"/>
+              </a:rPr>
+              <a:t> - </a:t>
+            </a:r>
+            <a:r>
+              <a:rPr lang="en-US" sz="1400" dirty="0">
+                <a:solidFill>
+                  <a:srgbClr val="1E2761"/>
+                </a:solidFill>
+                <a:latin typeface="Calibri" pitchFamily="34" charset="0"/>
+                <a:ea typeface="Calibri" pitchFamily="34" charset="-122"/>
+                <a:cs typeface="Calibri" pitchFamily="34" charset="-120"/>
+              </a:rPr>
+              <a:t>1,200</a:t>
+            </a:r>
+            <a:endParaRPr lang="en-US" sz="1400" dirty="0"/>
           </a:p>
         </p:txBody>
       </p:sp>
@@ -4809,7 +5286,7 @@
         </p:nvSpPr>
         <p:spPr>
           <a:xfrm>
-            <a:off x="1325880" y="4059936"/>
+            <a:off x="1325880" y="4117347"/>
             <a:ext cx="4335628" cy="292608"/>
           </a:xfrm>
           <a:prstGeom prst="rect">
@@ -4864,55 +5341,41 @@
             <a:pPr marL="0" indent="0">
               <a:buNone/>
             </a:pPr>
-            <a:r>
-              <a:rPr lang="en-US" sz="1050" dirty="0">
-                <a:solidFill>
-                  <a:srgbClr val="6B7280"/>
+            <a:endParaRPr lang="en-US" sz="1050" dirty="0"/>
+          </a:p>
+        </p:txBody>
+      </p:sp>
+      <p:sp>
+        <p:nvSpPr>
+          <p:cNvPr id="23" name="Text 21"/>
+          <p:cNvSpPr/>
+          <p:nvPr/>
+        </p:nvSpPr>
+        <p:spPr>
+          <a:xfrm>
+            <a:off x="822960" y="4873752"/>
+            <a:ext cx="4838548" cy="384048"/>
+          </a:xfrm>
+          <a:prstGeom prst="rect">
+            <a:avLst/>
+          </a:prstGeom>
+          <a:noFill/>
+          <a:ln/>
+        </p:spPr>
+        <p:txBody>
+          <a:bodyPr wrap="square" lIns="0" tIns="0" rIns="0" bIns="0" rtlCol="0" anchor="ctr"/>
+          <a:lstStyle/>
+          <a:p>
+            <a:r>
+              <a:rPr lang="en-US" sz="2200" b="1" dirty="0">
+                <a:solidFill>
+                  <a:srgbClr val="1E2761"/>
                 </a:solidFill>
                 <a:latin typeface="Calibri" pitchFamily="34" charset="0"/>
                 <a:ea typeface="Calibri" pitchFamily="34" charset="-122"/>
                 <a:cs typeface="Calibri" pitchFamily="34" charset="-120"/>
               </a:rPr>
-              <a:t>Categorical vs. Continuous columns</a:t>
-            </a:r>
-            <a:endParaRPr lang="en-US" sz="1050" dirty="0"/>
-          </a:p>
-        </p:txBody>
-      </p:sp>
-      <p:sp>
-        <p:nvSpPr>
-          <p:cNvPr id="23" name="Text 21"/>
-          <p:cNvSpPr/>
-          <p:nvPr/>
-        </p:nvSpPr>
-        <p:spPr>
-          <a:xfrm>
-            <a:off x="822960" y="4873752"/>
-            <a:ext cx="4838548" cy="384048"/>
-          </a:xfrm>
-          <a:prstGeom prst="rect">
-            <a:avLst/>
-          </a:prstGeom>
-          <a:noFill/>
-          <a:ln/>
-        </p:spPr>
-        <p:txBody>
-          <a:bodyPr wrap="square" lIns="0" tIns="0" rIns="0" bIns="0" rtlCol="0" anchor="ctr"/>
-          <a:lstStyle/>
-          <a:p>
-            <a:pPr marL="0" indent="0" algn="l">
-              <a:buNone/>
-            </a:pPr>
-            <a:r>
-              <a:rPr lang="en-US" sz="2200" b="1" dirty="0">
-                <a:solidFill>
-                  <a:srgbClr val="1E2761"/>
-                </a:solidFill>
-                <a:latin typeface="Calibri" pitchFamily="34" charset="0"/>
-                <a:ea typeface="Calibri" pitchFamily="34" charset="-122"/>
-                <a:cs typeface="Calibri" pitchFamily="34" charset="-120"/>
-              </a:rPr>
-              <a:t>[ # / # ]</a:t>
+              <a:t>14 Categorical / 8 numerical</a:t>
             </a:r>
             <a:endParaRPr lang="en-US" sz="2200" dirty="0"/>
           </a:p>
@@ -4960,7 +5423,7 @@
         </p:nvSpPr>
         <p:spPr>
           <a:xfrm>
-            <a:off x="6530188" y="4096512"/>
+            <a:off x="6421982" y="3925323"/>
             <a:ext cx="384048" cy="384048"/>
           </a:xfrm>
           <a:prstGeom prst="roundRect">
@@ -4989,7 +5452,7 @@
         </p:nvSpPr>
         <p:spPr>
           <a:xfrm>
-            <a:off x="6530188" y="4096512"/>
+            <a:off x="6421982" y="3915855"/>
             <a:ext cx="384048" cy="384048"/>
           </a:xfrm>
           <a:prstGeom prst="rect">
@@ -5028,7 +5491,7 @@
         </p:nvSpPr>
         <p:spPr>
           <a:xfrm>
-            <a:off x="7033108" y="4059936"/>
+            <a:off x="6914236" y="3959098"/>
             <a:ext cx="4335628" cy="292608"/>
           </a:xfrm>
           <a:prstGeom prst="rect">
@@ -5083,47 +5546,44 @@
             <a:pPr marL="0" indent="0">
               <a:buNone/>
             </a:pPr>
-            <a:r>
-              <a:rPr lang="en-US" sz="1050" dirty="0">
-                <a:solidFill>
-                  <a:srgbClr val="6B7280"/>
+            <a:endParaRPr lang="en-US" sz="1050" dirty="0"/>
+          </a:p>
+        </p:txBody>
+      </p:sp>
+      <p:sp>
+        <p:nvSpPr>
+          <p:cNvPr id="29" name="Text 27"/>
+          <p:cNvSpPr/>
+          <p:nvPr/>
+        </p:nvSpPr>
+        <p:spPr>
+          <a:xfrm>
+            <a:off x="6438747" y="4370324"/>
+            <a:ext cx="5081193" cy="960374"/>
+          </a:xfrm>
+          <a:prstGeom prst="rect">
+            <a:avLst/>
+          </a:prstGeom>
+          <a:noFill/>
+          <a:ln/>
+        </p:spPr>
+        <p:txBody>
+          <a:bodyPr wrap="square" lIns="0" tIns="0" rIns="0" bIns="0" rtlCol="0" anchor="ctr"/>
+          <a:lstStyle/>
+          <a:p>
+            <a:r>
+              <a:rPr lang="en-US" sz="1400" b="1" dirty="0">
+                <a:solidFill>
+                  <a:srgbClr val="1E2761"/>
                 </a:solidFill>
                 <a:latin typeface="Calibri" pitchFamily="34" charset="0"/>
                 <a:ea typeface="Calibri" pitchFamily="34" charset="-122"/>
                 <a:cs typeface="Calibri" pitchFamily="34" charset="-120"/>
               </a:rPr>
-              <a:t>Present? Which column(s)?</a:t>
-            </a:r>
-            <a:endParaRPr lang="en-US" sz="1050" dirty="0"/>
-          </a:p>
-        </p:txBody>
-      </p:sp>
-      <p:sp>
-        <p:nvSpPr>
-          <p:cNvPr id="29" name="Text 27"/>
-          <p:cNvSpPr/>
-          <p:nvPr/>
-        </p:nvSpPr>
-        <p:spPr>
-          <a:xfrm>
-            <a:off x="6530188" y="4873752"/>
-            <a:ext cx="4838548" cy="384048"/>
-          </a:xfrm>
-          <a:prstGeom prst="rect">
-            <a:avLst/>
-          </a:prstGeom>
-          <a:noFill/>
-          <a:ln/>
-        </p:spPr>
-        <p:txBody>
-          <a:bodyPr wrap="square" lIns="0" tIns="0" rIns="0" bIns="0" rtlCol="0" anchor="ctr"/>
-          <a:lstStyle/>
-          <a:p>
-            <a:pPr marL="0" indent="0" algn="l">
-              <a:buNone/>
-            </a:pPr>
-            <a:r>
-              <a:rPr lang="en-US" sz="2200" b="1" dirty="0">
+              <a:t>Invalid values: </a:t>
+            </a:r>
+            <a:r>
+              <a:rPr lang="en-US" sz="1400" dirty="0" err="1">
                 <a:solidFill>
                   <a:srgbClr val="1E2761"/>
                 </a:solidFill>
@@ -5131,87 +5591,239 @@
                 <a:ea typeface="Calibri" pitchFamily="34" charset="-122"/>
                 <a:cs typeface="Calibri" pitchFamily="34" charset="-120"/>
               </a:rPr>
-              <a:t>[ ? ]</a:t>
-            </a:r>
-            <a:endParaRPr lang="en-US" sz="2200" dirty="0"/>
-          </a:p>
-        </p:txBody>
-      </p:sp>
-      <p:sp>
-        <p:nvSpPr>
-          <p:cNvPr id="30" name="Text 28"/>
-          <p:cNvSpPr/>
-          <p:nvPr/>
-        </p:nvSpPr>
-        <p:spPr>
-          <a:xfrm>
-            <a:off x="548640" y="6473952"/>
-            <a:ext cx="4572000" cy="274320"/>
-          </a:xfrm>
-          <a:prstGeom prst="rect">
-            <a:avLst/>
-          </a:prstGeom>
-          <a:noFill/>
-          <a:ln/>
-        </p:spPr>
-        <p:txBody>
-          <a:bodyPr wrap="square" lIns="0" tIns="0" rIns="0" bIns="0" rtlCol="0" anchor="ctr"/>
-          <a:lstStyle/>
-          <a:p>
-            <a:pPr marL="0" indent="0" algn="l">
-              <a:buNone/>
-            </a:pPr>
-            <a:r>
-              <a:rPr lang="en-US" sz="900" dirty="0">
-                <a:solidFill>
-                  <a:srgbClr val="6B7280"/>
+              <a:t>Num_Bank_Accounts</a:t>
+            </a:r>
+            <a:r>
+              <a:rPr lang="en-US" sz="1400" dirty="0">
+                <a:solidFill>
+                  <a:srgbClr val="1E2761"/>
                 </a:solidFill>
                 <a:latin typeface="Calibri" pitchFamily="34" charset="0"/>
                 <a:ea typeface="Calibri" pitchFamily="34" charset="-122"/>
                 <a:cs typeface="Calibri" pitchFamily="34" charset="-120"/>
               </a:rPr>
-              <a:t>Capstone Dataset Proposal</a:t>
-            </a:r>
-            <a:endParaRPr lang="en-US" sz="900" dirty="0"/>
-          </a:p>
-        </p:txBody>
-      </p:sp>
-      <p:sp>
-        <p:nvSpPr>
-          <p:cNvPr id="31" name="Text 29"/>
-          <p:cNvSpPr/>
-          <p:nvPr/>
-        </p:nvSpPr>
-        <p:spPr>
-          <a:xfrm>
-            <a:off x="8899855" y="6473952"/>
-            <a:ext cx="2743200" cy="274320"/>
-          </a:xfrm>
-          <a:prstGeom prst="rect">
-            <a:avLst/>
-          </a:prstGeom>
-          <a:noFill/>
-          <a:ln/>
-        </p:spPr>
-        <p:txBody>
-          <a:bodyPr wrap="square" lIns="0" tIns="0" rIns="0" bIns="0" rtlCol="0" anchor="ctr"/>
-          <a:lstStyle/>
-          <a:p>
-            <a:pPr marL="0" indent="0" algn="r">
-              <a:buNone/>
-            </a:pPr>
-            <a:r>
-              <a:rPr lang="en-US" sz="900" dirty="0">
-                <a:solidFill>
-                  <a:srgbClr val="6B7280"/>
+              <a:t> (-1), </a:t>
+            </a:r>
+            <a:r>
+              <a:rPr lang="en-US" sz="1400" dirty="0" err="1">
+                <a:solidFill>
+                  <a:srgbClr val="1E2761"/>
                 </a:solidFill>
                 <a:latin typeface="Calibri" pitchFamily="34" charset="0"/>
                 <a:ea typeface="Calibri" pitchFamily="34" charset="-122"/>
                 <a:cs typeface="Calibri" pitchFamily="34" charset="-120"/>
               </a:rPr>
+              <a:t>Delay_from_due_date</a:t>
+            </a:r>
+            <a:r>
+              <a:rPr lang="en-US" sz="1400" dirty="0">
+                <a:solidFill>
+                  <a:srgbClr val="1E2761"/>
+                </a:solidFill>
+                <a:latin typeface="Calibri" pitchFamily="34" charset="0"/>
+                <a:ea typeface="Calibri" pitchFamily="34" charset="-122"/>
+                <a:cs typeface="Calibri" pitchFamily="34" charset="-120"/>
+              </a:rPr>
+              <a:t> (-5)</a:t>
+            </a:r>
+          </a:p>
+          <a:p>
+            <a:r>
+              <a:rPr lang="en-US" sz="1400" b="1" dirty="0">
+                <a:solidFill>
+                  <a:srgbClr val="1E2761"/>
+                </a:solidFill>
+                <a:latin typeface="Calibri" pitchFamily="34" charset="0"/>
+                <a:ea typeface="Calibri" pitchFamily="34" charset="-122"/>
+                <a:cs typeface="Calibri" pitchFamily="34" charset="-120"/>
+              </a:rPr>
+              <a:t>Implausible values: </a:t>
+            </a:r>
+            <a:r>
+              <a:rPr lang="en-US" sz="1400" dirty="0" err="1">
+                <a:solidFill>
+                  <a:srgbClr val="1E2761"/>
+                </a:solidFill>
+                <a:latin typeface="Calibri" pitchFamily="34" charset="0"/>
+                <a:ea typeface="Calibri" pitchFamily="34" charset="-122"/>
+                <a:cs typeface="Calibri" pitchFamily="34" charset="-120"/>
+              </a:rPr>
+              <a:t>Interest_Rate</a:t>
+            </a:r>
+            <a:r>
+              <a:rPr lang="en-US" sz="1400" dirty="0">
+                <a:solidFill>
+                  <a:srgbClr val="1E2761"/>
+                </a:solidFill>
+                <a:latin typeface="Calibri" pitchFamily="34" charset="0"/>
+                <a:ea typeface="Calibri" pitchFamily="34" charset="-122"/>
+                <a:cs typeface="Calibri" pitchFamily="34" charset="-120"/>
+              </a:rPr>
+              <a:t> (max 5,797%), </a:t>
+            </a:r>
+            <a:r>
+              <a:rPr lang="en-US" sz="1400" dirty="0" err="1">
+                <a:solidFill>
+                  <a:srgbClr val="1E2761"/>
+                </a:solidFill>
+                <a:latin typeface="Calibri" pitchFamily="34" charset="0"/>
+                <a:ea typeface="Calibri" pitchFamily="34" charset="-122"/>
+                <a:cs typeface="Calibri" pitchFamily="34" charset="-120"/>
+              </a:rPr>
+              <a:t>Num_Credit_Card</a:t>
+            </a:r>
+            <a:r>
+              <a:rPr lang="en-US" sz="1400" dirty="0">
+                <a:solidFill>
+                  <a:srgbClr val="1E2761"/>
+                </a:solidFill>
+                <a:latin typeface="Calibri" pitchFamily="34" charset="0"/>
+                <a:ea typeface="Calibri" pitchFamily="34" charset="-122"/>
+                <a:cs typeface="Calibri" pitchFamily="34" charset="-120"/>
+              </a:rPr>
+              <a:t> (max 1,499), </a:t>
+            </a:r>
+            <a:r>
+              <a:rPr lang="en-US" sz="1400" dirty="0" err="1">
+                <a:solidFill>
+                  <a:srgbClr val="1E2761"/>
+                </a:solidFill>
+                <a:latin typeface="Calibri" pitchFamily="34" charset="0"/>
+                <a:ea typeface="Calibri" pitchFamily="34" charset="-122"/>
+                <a:cs typeface="Calibri" pitchFamily="34" charset="-120"/>
+              </a:rPr>
+              <a:t>Num_Credit_Inquiries</a:t>
+            </a:r>
+            <a:r>
+              <a:rPr lang="en-US" sz="1400" dirty="0">
+                <a:solidFill>
+                  <a:srgbClr val="1E2761"/>
+                </a:solidFill>
+                <a:latin typeface="Calibri" pitchFamily="34" charset="0"/>
+                <a:ea typeface="Calibri" pitchFamily="34" charset="-122"/>
+                <a:cs typeface="Calibri" pitchFamily="34" charset="-120"/>
+              </a:rPr>
+              <a:t> (max 2,597)</a:t>
+            </a:r>
+            <a:endParaRPr lang="en-US" sz="1400" dirty="0"/>
+          </a:p>
+        </p:txBody>
+      </p:sp>
+      <p:sp>
+        <p:nvSpPr>
+          <p:cNvPr id="30" name="Text 28"/>
+          <p:cNvSpPr/>
+          <p:nvPr/>
+        </p:nvSpPr>
+        <p:spPr>
+          <a:xfrm>
+            <a:off x="548640" y="6473952"/>
+            <a:ext cx="4572000" cy="274320"/>
+          </a:xfrm>
+          <a:prstGeom prst="rect">
+            <a:avLst/>
+          </a:prstGeom>
+          <a:noFill/>
+          <a:ln/>
+        </p:spPr>
+        <p:txBody>
+          <a:bodyPr wrap="square" lIns="0" tIns="0" rIns="0" bIns="0" rtlCol="0" anchor="ctr"/>
+          <a:lstStyle/>
+          <a:p>
+            <a:pPr marL="0" indent="0" algn="l">
+              <a:buNone/>
+            </a:pPr>
+            <a:r>
+              <a:rPr lang="en-US" sz="900" dirty="0">
+                <a:solidFill>
+                  <a:srgbClr val="6B7280"/>
+                </a:solidFill>
+                <a:latin typeface="Calibri" pitchFamily="34" charset="0"/>
+                <a:ea typeface="Calibri" pitchFamily="34" charset="-122"/>
+                <a:cs typeface="Calibri" pitchFamily="34" charset="-120"/>
+              </a:rPr>
+              <a:t>Capstone Dataset Proposal</a:t>
+            </a:r>
+            <a:endParaRPr lang="en-US" sz="900" dirty="0"/>
+          </a:p>
+        </p:txBody>
+      </p:sp>
+      <p:sp>
+        <p:nvSpPr>
+          <p:cNvPr id="31" name="Text 29"/>
+          <p:cNvSpPr/>
+          <p:nvPr/>
+        </p:nvSpPr>
+        <p:spPr>
+          <a:xfrm>
+            <a:off x="8899855" y="6473952"/>
+            <a:ext cx="2743200" cy="274320"/>
+          </a:xfrm>
+          <a:prstGeom prst="rect">
+            <a:avLst/>
+          </a:prstGeom>
+          <a:noFill/>
+          <a:ln/>
+        </p:spPr>
+        <p:txBody>
+          <a:bodyPr wrap="square" lIns="0" tIns="0" rIns="0" bIns="0" rtlCol="0" anchor="ctr"/>
+          <a:lstStyle/>
+          <a:p>
+            <a:pPr marL="0" indent="0" algn="r">
+              <a:buNone/>
+            </a:pPr>
+            <a:r>
+              <a:rPr lang="en-US" sz="900" dirty="0">
+                <a:solidFill>
+                  <a:srgbClr val="6B7280"/>
+                </a:solidFill>
+                <a:latin typeface="Calibri" pitchFamily="34" charset="0"/>
+                <a:ea typeface="Calibri" pitchFamily="34" charset="-122"/>
+                <a:cs typeface="Calibri" pitchFamily="34" charset="-120"/>
+              </a:rPr>
               <a:t>Topic 2 — EDA Findings</a:t>
             </a:r>
             <a:endParaRPr lang="en-US" sz="900" dirty="0"/>
+          </a:p>
+        </p:txBody>
+      </p:sp>
+      <p:sp>
+        <p:nvSpPr>
+          <p:cNvPr id="32" name="TextBox 31">
+            <a:extLst>
+              <a:ext uri="{FF2B5EF4-FFF2-40B4-BE49-F238E27FC236}">
+                <a16:creationId xmlns:a16="http://schemas.microsoft.com/office/drawing/2014/main" id="{F470176C-B842-6661-9F5E-9246C20EDF5E}"/>
+              </a:ext>
+            </a:extLst>
+          </p:cNvPr>
+          <p:cNvSpPr txBox="1"/>
+          <p:nvPr/>
+        </p:nvSpPr>
+        <p:spPr>
+          <a:xfrm>
+            <a:off x="822960" y="2825496"/>
+            <a:ext cx="4838548" cy="369332"/>
+          </a:xfrm>
+          <a:prstGeom prst="rect">
+            <a:avLst/>
+          </a:prstGeom>
+          <a:noFill/>
+        </p:spPr>
+        <p:txBody>
+          <a:bodyPr wrap="square" rtlCol="0">
+            <a:spAutoFit/>
+          </a:bodyPr>
+          <a:lstStyle/>
+          <a:p>
+            <a:r>
+              <a:rPr lang="en-US" dirty="0"/>
+              <a:t>Classification: </a:t>
+            </a:r>
+            <a:r>
+              <a:rPr lang="en-US" b="1" dirty="0"/>
+              <a:t>Poor, Standard, or Good</a:t>
+            </a:r>
+            <a:endParaRPr lang="en-BH" b="1" dirty="0"/>
           </a:p>
         </p:txBody>
       </p:sp>
@@ -5349,7 +5961,7 @@
                 <a:ea typeface="Cambria" pitchFamily="34" charset="-122"/>
                 <a:cs typeface="Cambria" pitchFamily="34" charset="-120"/>
               </a:rPr>
-              <a:t>[ Dataset / Topic Name ]</a:t>
+              <a:t>Credit Card Fraud</a:t>
             </a:r>
             <a:endParaRPr lang="en-US" sz="3000" dirty="0"/>
           </a:p>
@@ -5379,17 +5991,6 @@
             <a:pPr marL="0" indent="0">
               <a:buNone/>
             </a:pPr>
-            <a:r>
-              <a:rPr lang="en-US" sz="1200" i="1" dirty="0">
-                <a:solidFill>
-                  <a:srgbClr val="6B7280"/>
-                </a:solidFill>
-                <a:latin typeface="Calibri" pitchFamily="34" charset="0"/>
-                <a:ea typeface="Calibri" pitchFamily="34" charset="-122"/>
-                <a:cs typeface="Calibri" pitchFamily="34" charset="-120"/>
-              </a:rPr>
-              <a:t>[ 1-line source / dataset tag ]</a:t>
-            </a:r>
             <a:endParaRPr lang="en-US" sz="1200" dirty="0"/>
           </a:p>
         </p:txBody>
@@ -5593,17 +6194,6 @@
             <a:pPr marL="0" indent="0" algn="ctr">
               <a:buNone/>
             </a:pPr>
-            <a:r>
-              <a:rPr lang="en-US" sz="1200" i="1" dirty="0">
-                <a:solidFill>
-                  <a:srgbClr val="6B7280"/>
-                </a:solidFill>
-                <a:latin typeface="Calibri" pitchFamily="34" charset="0"/>
-                <a:ea typeface="Calibri" pitchFamily="34" charset="-122"/>
-                <a:cs typeface="Calibri" pitchFamily="34" charset="-120"/>
-              </a:rPr>
-              <a:t>[ Describe the business / real-world problem this topic addresses ]</a:t>
-            </a:r>
             <a:endParaRPr lang="en-US" sz="1200" dirty="0"/>
           </a:p>
         </p:txBody>
@@ -5753,7 +6343,7 @@
         <p:spPr>
           <a:xfrm>
             <a:off x="7498080" y="3246120"/>
-            <a:ext cx="3870655" cy="2377440"/>
+            <a:ext cx="3870655" cy="2606040"/>
           </a:xfrm>
           <a:prstGeom prst="roundRect">
             <a:avLst>
@@ -5802,8 +6392,36 @@
             <a:pPr marL="0" indent="0" algn="ctr">
               <a:buNone/>
             </a:pPr>
-            <a:r>
-              <a:rPr lang="en-US" sz="1200" i="1" dirty="0">
+            <a:endParaRPr lang="en-US" sz="1200" dirty="0"/>
+          </a:p>
+        </p:txBody>
+      </p:sp>
+      <p:sp>
+        <p:nvSpPr>
+          <p:cNvPr id="18" name="Text 16"/>
+          <p:cNvSpPr/>
+          <p:nvPr/>
+        </p:nvSpPr>
+        <p:spPr>
+          <a:xfrm>
+            <a:off x="548640" y="6473952"/>
+            <a:ext cx="4572000" cy="274320"/>
+          </a:xfrm>
+          <a:prstGeom prst="rect">
+            <a:avLst/>
+          </a:prstGeom>
+          <a:noFill/>
+          <a:ln/>
+        </p:spPr>
+        <p:txBody>
+          <a:bodyPr wrap="square" lIns="0" tIns="0" rIns="0" bIns="0" rtlCol="0" anchor="ctr"/>
+          <a:lstStyle/>
+          <a:p>
+            <a:pPr marL="0" indent="0" algn="l">
+              <a:buNone/>
+            </a:pPr>
+            <a:r>
+              <a:rPr lang="en-US" sz="900" dirty="0">
                 <a:solidFill>
                   <a:srgbClr val="6B7280"/>
                 </a:solidFill>
@@ -5811,34 +6429,34 @@
                 <a:ea typeface="Calibri" pitchFamily="34" charset="-122"/>
                 <a:cs typeface="Calibri" pitchFamily="34" charset="-120"/>
               </a:rPr>
-              <a:t>[ What are you trying to predict / achieve? ]</a:t>
-            </a:r>
-            <a:endParaRPr lang="en-US" sz="1200" dirty="0"/>
-          </a:p>
-        </p:txBody>
-      </p:sp>
-      <p:sp>
-        <p:nvSpPr>
-          <p:cNvPr id="18" name="Text 16"/>
-          <p:cNvSpPr/>
-          <p:nvPr/>
-        </p:nvSpPr>
-        <p:spPr>
-          <a:xfrm>
-            <a:off x="548640" y="6473952"/>
-            <a:ext cx="4572000" cy="274320"/>
-          </a:xfrm>
-          <a:prstGeom prst="rect">
-            <a:avLst/>
-          </a:prstGeom>
-          <a:noFill/>
-          <a:ln/>
-        </p:spPr>
-        <p:txBody>
-          <a:bodyPr wrap="square" lIns="0" tIns="0" rIns="0" bIns="0" rtlCol="0" anchor="ctr"/>
-          <a:lstStyle/>
-          <a:p>
-            <a:pPr marL="0" indent="0" algn="l">
+              <a:t>Capstone Dataset Proposal</a:t>
+            </a:r>
+            <a:endParaRPr lang="en-US" sz="900" dirty="0"/>
+          </a:p>
+        </p:txBody>
+      </p:sp>
+      <p:sp>
+        <p:nvSpPr>
+          <p:cNvPr id="19" name="Text 17"/>
+          <p:cNvSpPr/>
+          <p:nvPr/>
+        </p:nvSpPr>
+        <p:spPr>
+          <a:xfrm>
+            <a:off x="8899855" y="6473952"/>
+            <a:ext cx="2743200" cy="274320"/>
+          </a:xfrm>
+          <a:prstGeom prst="rect">
+            <a:avLst/>
+          </a:prstGeom>
+          <a:noFill/>
+          <a:ln/>
+        </p:spPr>
+        <p:txBody>
+          <a:bodyPr wrap="square" lIns="0" tIns="0" rIns="0" bIns="0" rtlCol="0" anchor="ctr"/>
+          <a:lstStyle/>
+          <a:p>
+            <a:pPr marL="0" indent="0" algn="r">
               <a:buNone/>
             </a:pPr>
             <a:r>
@@ -5850,7 +6468,7 @@
                 <a:ea typeface="Calibri" pitchFamily="34" charset="-122"/>
                 <a:cs typeface="Calibri" pitchFamily="34" charset="-120"/>
               </a:rPr>
-              <a:t>Capstone Dataset Proposal</a:t>
+              <a:t>Topic 3 — Overview</a:t>
             </a:r>
             <a:endParaRPr lang="en-US" sz="900" dirty="0"/>
           </a:p>
@@ -5858,40 +6476,141 @@
       </p:sp>
       <p:sp>
         <p:nvSpPr>
-          <p:cNvPr id="19" name="Text 17"/>
-          <p:cNvSpPr/>
-          <p:nvPr/>
-        </p:nvSpPr>
-        <p:spPr>
-          <a:xfrm>
-            <a:off x="8899855" y="6473952"/>
-            <a:ext cx="2743200" cy="274320"/>
-          </a:xfrm>
-          <a:prstGeom prst="rect">
-            <a:avLst/>
-          </a:prstGeom>
-          <a:noFill/>
-          <a:ln/>
-        </p:spPr>
-        <p:txBody>
-          <a:bodyPr wrap="square" lIns="0" tIns="0" rIns="0" bIns="0" rtlCol="0" anchor="ctr"/>
-          <a:lstStyle/>
-          <a:p>
-            <a:pPr marL="0" indent="0" algn="r">
-              <a:buNone/>
-            </a:pPr>
-            <a:r>
-              <a:rPr lang="en-US" sz="900" dirty="0">
-                <a:solidFill>
-                  <a:srgbClr val="6B7280"/>
-                </a:solidFill>
-                <a:latin typeface="Calibri" pitchFamily="34" charset="0"/>
-                <a:ea typeface="Calibri" pitchFamily="34" charset="-122"/>
-                <a:cs typeface="Calibri" pitchFamily="34" charset="-120"/>
-              </a:rPr>
-              <a:t>Topic 3 — Overview</a:t>
-            </a:r>
-            <a:endParaRPr lang="en-US" sz="900" dirty="0"/>
+          <p:cNvPr id="20" name="TextBox 19">
+            <a:extLst>
+              <a:ext uri="{FF2B5EF4-FFF2-40B4-BE49-F238E27FC236}">
+                <a16:creationId xmlns:a16="http://schemas.microsoft.com/office/drawing/2014/main" id="{FF5CADA2-BCFD-EC72-FEFC-A380CD3C148C}"/>
+              </a:ext>
+            </a:extLst>
+          </p:cNvPr>
+          <p:cNvSpPr txBox="1"/>
+          <p:nvPr/>
+        </p:nvSpPr>
+        <p:spPr>
+          <a:xfrm>
+            <a:off x="994611" y="3172968"/>
+            <a:ext cx="5374105" cy="2308324"/>
+          </a:xfrm>
+          <a:prstGeom prst="rect">
+            <a:avLst/>
+          </a:prstGeom>
+          <a:noFill/>
+        </p:spPr>
+        <p:txBody>
+          <a:bodyPr wrap="square" rtlCol="0">
+            <a:spAutoFit/>
+          </a:bodyPr>
+          <a:lstStyle/>
+          <a:p>
+            <a:pPr marL="285750" lvl="0" indent="-285750">
+              <a:buFont typeface="Arial" panose="020B0604020202020204" pitchFamily="34" charset="0"/>
+              <a:buChar char="•"/>
+            </a:pPr>
+            <a:r>
+              <a:rPr lang="en-BH" dirty="0"/>
+              <a:t>Credit card fraud causes significant financial losses for banks and customers</a:t>
+            </a:r>
+          </a:p>
+          <a:p>
+            <a:pPr marL="285750" lvl="0" indent="-285750">
+              <a:buFont typeface="Arial" panose="020B0604020202020204" pitchFamily="34" charset="0"/>
+              <a:buChar char="•"/>
+            </a:pPr>
+            <a:r>
+              <a:rPr lang="en-BH" dirty="0"/>
+              <a:t>Detecting it in real time is difficult — fraud is rare and designed to resemble legitimate activity</a:t>
+            </a:r>
+          </a:p>
+          <a:p>
+            <a:pPr marL="285750" lvl="0" indent="-285750">
+              <a:buFont typeface="Arial" panose="020B0604020202020204" pitchFamily="34" charset="0"/>
+              <a:buChar char="•"/>
+            </a:pPr>
+            <a:r>
+              <a:rPr lang="en-BH" dirty="0"/>
+              <a:t>This project builds a classifier to predict fraudulent transactions using transaction-level, device, and behavioral features</a:t>
+            </a:r>
+          </a:p>
+          <a:p>
+            <a:endParaRPr lang="en-BH" dirty="0"/>
+          </a:p>
+        </p:txBody>
+      </p:sp>
+      <p:sp>
+        <p:nvSpPr>
+          <p:cNvPr id="21" name="TextBox 20">
+            <a:extLst>
+              <a:ext uri="{FF2B5EF4-FFF2-40B4-BE49-F238E27FC236}">
+                <a16:creationId xmlns:a16="http://schemas.microsoft.com/office/drawing/2014/main" id="{7D21AE6D-7CFE-2F4E-0A4A-009DBEE3A0F9}"/>
+              </a:ext>
+            </a:extLst>
+          </p:cNvPr>
+          <p:cNvSpPr txBox="1"/>
+          <p:nvPr/>
+        </p:nvSpPr>
+        <p:spPr>
+          <a:xfrm>
+            <a:off x="7636932" y="3336018"/>
+            <a:ext cx="3686388" cy="2246769"/>
+          </a:xfrm>
+          <a:prstGeom prst="rect">
+            <a:avLst/>
+          </a:prstGeom>
+          <a:noFill/>
+        </p:spPr>
+        <p:txBody>
+          <a:bodyPr wrap="square" rtlCol="0">
+            <a:spAutoFit/>
+          </a:bodyPr>
+          <a:lstStyle/>
+          <a:p>
+            <a:r>
+              <a:rPr lang="en-US" sz="1400" dirty="0">
+                <a:solidFill>
+                  <a:schemeClr val="bg2"/>
+                </a:solidFill>
+              </a:rPr>
+              <a:t>1- Build a binary classifier to flag fraudulent transactions</a:t>
+            </a:r>
+          </a:p>
+          <a:p>
+            <a:endParaRPr lang="en-US" sz="1400" dirty="0">
+              <a:solidFill>
+                <a:schemeClr val="bg2"/>
+              </a:solidFill>
+            </a:endParaRPr>
+          </a:p>
+          <a:p>
+            <a:r>
+              <a:rPr lang="en-US" sz="1400" dirty="0">
+                <a:solidFill>
+                  <a:schemeClr val="bg2"/>
+                </a:solidFill>
+              </a:rPr>
+              <a:t>2- Handle severe class imbalance (~1.7% fraud rate) via class weighting, resampling, or threshold tuning</a:t>
+            </a:r>
+          </a:p>
+          <a:p>
+            <a:endParaRPr lang="en-US" sz="1400" dirty="0">
+              <a:solidFill>
+                <a:schemeClr val="bg2"/>
+              </a:solidFill>
+            </a:endParaRPr>
+          </a:p>
+          <a:p>
+            <a:r>
+              <a:rPr lang="en-US" sz="1400" dirty="0">
+                <a:solidFill>
+                  <a:schemeClr val="bg2"/>
+                </a:solidFill>
+              </a:rPr>
+              <a:t>3- Identify key fraud predictors and evaluate using metrics suited to imbalanced data (precision, recall, F1, PR-AUC)</a:t>
+            </a:r>
+            <a:endParaRPr lang="en-BH" sz="1400" dirty="0">
+              <a:solidFill>
+                <a:schemeClr val="bg2"/>
+              </a:solidFill>
+            </a:endParaRPr>
           </a:p>
         </p:txBody>
       </p:sp>
@@ -6068,7 +6787,7 @@
                 <a:ea typeface="Calibri" pitchFamily="34" charset="-122"/>
                 <a:cs typeface="Calibri" pitchFamily="34" charset="-120"/>
               </a:rPr>
-              <a:t>[ Dataset / Topic Name ]</a:t>
+              <a:t>Credit Card Fraud </a:t>
             </a:r>
             <a:endParaRPr lang="en-US" sz="1200" dirty="0"/>
           </a:p>
@@ -6184,7 +6903,7 @@
         </p:nvSpPr>
         <p:spPr>
           <a:xfrm>
-            <a:off x="1325880" y="2139696"/>
+            <a:off x="1325880" y="2231136"/>
             <a:ext cx="4335628" cy="292608"/>
           </a:xfrm>
           <a:prstGeom prst="rect">
@@ -6239,55 +6958,41 @@
             <a:pPr marL="0" indent="0">
               <a:buNone/>
             </a:pPr>
-            <a:r>
-              <a:rPr lang="en-US" sz="1050" dirty="0">
-                <a:solidFill>
-                  <a:srgbClr val="6B7280"/>
+            <a:endParaRPr lang="en-US" sz="1050" dirty="0"/>
+          </a:p>
+        </p:txBody>
+      </p:sp>
+      <p:sp>
+        <p:nvSpPr>
+          <p:cNvPr id="11" name="Text 9"/>
+          <p:cNvSpPr/>
+          <p:nvPr/>
+        </p:nvSpPr>
+        <p:spPr>
+          <a:xfrm>
+            <a:off x="822960" y="2953512"/>
+            <a:ext cx="4838548" cy="384048"/>
+          </a:xfrm>
+          <a:prstGeom prst="rect">
+            <a:avLst/>
+          </a:prstGeom>
+          <a:noFill/>
+          <a:ln/>
+        </p:spPr>
+        <p:txBody>
+          <a:bodyPr wrap="square" lIns="0" tIns="0" rIns="0" bIns="0" rtlCol="0" anchor="ctr"/>
+          <a:lstStyle/>
+          <a:p>
+            <a:r>
+              <a:rPr lang="en-US" sz="2200" b="1" dirty="0">
+                <a:solidFill>
+                  <a:srgbClr val="1E2761"/>
                 </a:solidFill>
                 <a:latin typeface="Calibri" pitchFamily="34" charset="0"/>
                 <a:ea typeface="Calibri" pitchFamily="34" charset="-122"/>
                 <a:cs typeface="Calibri" pitchFamily="34" charset="-120"/>
               </a:rPr>
-              <a:t>Regression or Classification?</a:t>
-            </a:r>
-            <a:endParaRPr lang="en-US" sz="1050" dirty="0"/>
-          </a:p>
-        </p:txBody>
-      </p:sp>
-      <p:sp>
-        <p:nvSpPr>
-          <p:cNvPr id="11" name="Text 9"/>
-          <p:cNvSpPr/>
-          <p:nvPr/>
-        </p:nvSpPr>
-        <p:spPr>
-          <a:xfrm>
-            <a:off x="822960" y="2953512"/>
-            <a:ext cx="4838548" cy="384048"/>
-          </a:xfrm>
-          <a:prstGeom prst="rect">
-            <a:avLst/>
-          </a:prstGeom>
-          <a:noFill/>
-          <a:ln/>
-        </p:spPr>
-        <p:txBody>
-          <a:bodyPr wrap="square" lIns="0" tIns="0" rIns="0" bIns="0" rtlCol="0" anchor="ctr"/>
-          <a:lstStyle/>
-          <a:p>
-            <a:pPr marL="0" indent="0" algn="l">
-              <a:buNone/>
-            </a:pPr>
-            <a:r>
-              <a:rPr lang="en-US" sz="2200" b="1" dirty="0">
-                <a:solidFill>
-                  <a:srgbClr val="1E2761"/>
-                </a:solidFill>
-                <a:latin typeface="Calibri" pitchFamily="34" charset="0"/>
-                <a:ea typeface="Calibri" pitchFamily="34" charset="-122"/>
-                <a:cs typeface="Calibri" pitchFamily="34" charset="-120"/>
-              </a:rPr>
-              <a:t>[ ? ]</a:t>
+              <a:t>Classification: Fraud (1) or Not Fraud (0)</a:t>
             </a:r>
             <a:endParaRPr lang="en-US" sz="2200" dirty="0"/>
           </a:p>
@@ -6403,7 +7108,7 @@
         </p:nvSpPr>
         <p:spPr>
           <a:xfrm>
-            <a:off x="7033108" y="2139696"/>
+            <a:off x="7033108" y="2240280"/>
             <a:ext cx="4335628" cy="292608"/>
           </a:xfrm>
           <a:prstGeom prst="rect">
@@ -6458,55 +7163,41 @@
             <a:pPr marL="0" indent="0">
               <a:buNone/>
             </a:pPr>
-            <a:r>
-              <a:rPr lang="en-US" sz="1050" dirty="0">
-                <a:solidFill>
-                  <a:srgbClr val="6B7280"/>
+            <a:endParaRPr lang="en-US" sz="1050" dirty="0"/>
+          </a:p>
+        </p:txBody>
+      </p:sp>
+      <p:sp>
+        <p:nvSpPr>
+          <p:cNvPr id="17" name="Text 15"/>
+          <p:cNvSpPr/>
+          <p:nvPr/>
+        </p:nvSpPr>
+        <p:spPr>
+          <a:xfrm>
+            <a:off x="6530188" y="2953512"/>
+            <a:ext cx="4838548" cy="384048"/>
+          </a:xfrm>
+          <a:prstGeom prst="rect">
+            <a:avLst/>
+          </a:prstGeom>
+          <a:noFill/>
+          <a:ln/>
+        </p:spPr>
+        <p:txBody>
+          <a:bodyPr wrap="square" lIns="0" tIns="0" rIns="0" bIns="0" rtlCol="0" anchor="ctr"/>
+          <a:lstStyle/>
+          <a:p>
+            <a:r>
+              <a:rPr lang="en-US" sz="2200" b="1" dirty="0">
+                <a:solidFill>
+                  <a:srgbClr val="1E2761"/>
                 </a:solidFill>
                 <a:latin typeface="Calibri" pitchFamily="34" charset="0"/>
                 <a:ea typeface="Calibri" pitchFamily="34" charset="-122"/>
                 <a:cs typeface="Calibri" pitchFamily="34" charset="-120"/>
               </a:rPr>
-              <a:t>Count / columns affected (or “none”)</a:t>
-            </a:r>
-            <a:endParaRPr lang="en-US" sz="1050" dirty="0"/>
-          </a:p>
-        </p:txBody>
-      </p:sp>
-      <p:sp>
-        <p:nvSpPr>
-          <p:cNvPr id="17" name="Text 15"/>
-          <p:cNvSpPr/>
-          <p:nvPr/>
-        </p:nvSpPr>
-        <p:spPr>
-          <a:xfrm>
-            <a:off x="6530188" y="2953512"/>
-            <a:ext cx="4838548" cy="384048"/>
-          </a:xfrm>
-          <a:prstGeom prst="rect">
-            <a:avLst/>
-          </a:prstGeom>
-          <a:noFill/>
-          <a:ln/>
-        </p:spPr>
-        <p:txBody>
-          <a:bodyPr wrap="square" lIns="0" tIns="0" rIns="0" bIns="0" rtlCol="0" anchor="ctr"/>
-          <a:lstStyle/>
-          <a:p>
-            <a:pPr marL="0" indent="0" algn="l">
-              <a:buNone/>
-            </a:pPr>
-            <a:r>
-              <a:rPr lang="en-US" sz="2200" b="1" dirty="0">
-                <a:solidFill>
-                  <a:srgbClr val="1E2761"/>
-                </a:solidFill>
-                <a:latin typeface="Calibri" pitchFamily="34" charset="0"/>
-                <a:ea typeface="Calibri" pitchFamily="34" charset="-122"/>
-                <a:cs typeface="Calibri" pitchFamily="34" charset="-120"/>
-              </a:rPr>
-              <a:t>[ # ]</a:t>
+              <a:t>None — 0 nulls across all 26 columns</a:t>
             </a:r>
             <a:endParaRPr lang="en-US" sz="2200" dirty="0"/>
           </a:p>
@@ -6521,7 +7212,7 @@
         <p:spPr>
           <a:xfrm>
             <a:off x="548640" y="3840480"/>
-            <a:ext cx="5387188" cy="1600200"/>
+            <a:ext cx="5387188" cy="2023110"/>
           </a:xfrm>
           <a:prstGeom prst="roundRect">
             <a:avLst>
@@ -6622,7 +7313,7 @@
         </p:nvSpPr>
         <p:spPr>
           <a:xfrm>
-            <a:off x="1325880" y="4059936"/>
+            <a:off x="1325880" y="4142232"/>
             <a:ext cx="4335628" cy="292608"/>
           </a:xfrm>
           <a:prstGeom prst="rect">
@@ -6677,55 +7368,41 @@
             <a:pPr marL="0" indent="0">
               <a:buNone/>
             </a:pPr>
-            <a:r>
-              <a:rPr lang="en-US" sz="1050" dirty="0">
-                <a:solidFill>
-                  <a:srgbClr val="6B7280"/>
+            <a:endParaRPr lang="en-US" sz="1050" dirty="0"/>
+          </a:p>
+        </p:txBody>
+      </p:sp>
+      <p:sp>
+        <p:nvSpPr>
+          <p:cNvPr id="23" name="Text 21"/>
+          <p:cNvSpPr/>
+          <p:nvPr/>
+        </p:nvSpPr>
+        <p:spPr>
+          <a:xfrm>
+            <a:off x="822960" y="4873752"/>
+            <a:ext cx="4838548" cy="384048"/>
+          </a:xfrm>
+          <a:prstGeom prst="rect">
+            <a:avLst/>
+          </a:prstGeom>
+          <a:noFill/>
+          <a:ln/>
+        </p:spPr>
+        <p:txBody>
+          <a:bodyPr wrap="square" lIns="0" tIns="0" rIns="0" bIns="0" rtlCol="0" anchor="ctr"/>
+          <a:lstStyle/>
+          <a:p>
+            <a:r>
+              <a:rPr lang="en-US" sz="2200" b="1" dirty="0">
+                <a:solidFill>
+                  <a:srgbClr val="1E2761"/>
                 </a:solidFill>
                 <a:latin typeface="Calibri" pitchFamily="34" charset="0"/>
                 <a:ea typeface="Calibri" pitchFamily="34" charset="-122"/>
                 <a:cs typeface="Calibri" pitchFamily="34" charset="-120"/>
               </a:rPr>
-              <a:t>Categorical vs. Continuous columns</a:t>
-            </a:r>
-            <a:endParaRPr lang="en-US" sz="1050" dirty="0"/>
-          </a:p>
-        </p:txBody>
-      </p:sp>
-      <p:sp>
-        <p:nvSpPr>
-          <p:cNvPr id="23" name="Text 21"/>
-          <p:cNvSpPr/>
-          <p:nvPr/>
-        </p:nvSpPr>
-        <p:spPr>
-          <a:xfrm>
-            <a:off x="822960" y="4873752"/>
-            <a:ext cx="4838548" cy="384048"/>
-          </a:xfrm>
-          <a:prstGeom prst="rect">
-            <a:avLst/>
-          </a:prstGeom>
-          <a:noFill/>
-          <a:ln/>
-        </p:spPr>
-        <p:txBody>
-          <a:bodyPr wrap="square" lIns="0" tIns="0" rIns="0" bIns="0" rtlCol="0" anchor="ctr"/>
-          <a:lstStyle/>
-          <a:p>
-            <a:pPr marL="0" indent="0" algn="l">
-              <a:buNone/>
-            </a:pPr>
-            <a:r>
-              <a:rPr lang="en-US" sz="2200" b="1" dirty="0">
-                <a:solidFill>
-                  <a:srgbClr val="1E2761"/>
-                </a:solidFill>
-                <a:latin typeface="Calibri" pitchFamily="34" charset="0"/>
-                <a:ea typeface="Calibri" pitchFamily="34" charset="-122"/>
-                <a:cs typeface="Calibri" pitchFamily="34" charset="-120"/>
-              </a:rPr>
-              <a:t>[ # / # ]</a:t>
+              <a:t>11 Categorical / 13 numerical</a:t>
             </a:r>
             <a:endParaRPr lang="en-US" sz="2200" dirty="0"/>
           </a:p>
@@ -6740,7 +7417,7 @@
         <p:spPr>
           <a:xfrm>
             <a:off x="6255868" y="3840480"/>
-            <a:ext cx="5387188" cy="1600200"/>
+            <a:ext cx="5387188" cy="2023110"/>
           </a:xfrm>
           <a:prstGeom prst="roundRect">
             <a:avLst>
@@ -6841,7 +7518,7 @@
         </p:nvSpPr>
         <p:spPr>
           <a:xfrm>
-            <a:off x="7033108" y="4059936"/>
+            <a:off x="7033108" y="4142232"/>
             <a:ext cx="4335628" cy="292608"/>
           </a:xfrm>
           <a:prstGeom prst="rect">
@@ -6896,47 +7573,44 @@
             <a:pPr marL="0" indent="0">
               <a:buNone/>
             </a:pPr>
-            <a:r>
-              <a:rPr lang="en-US" sz="1050" dirty="0">
-                <a:solidFill>
-                  <a:srgbClr val="6B7280"/>
+            <a:endParaRPr lang="en-US" sz="1050" dirty="0"/>
+          </a:p>
+        </p:txBody>
+      </p:sp>
+      <p:sp>
+        <p:nvSpPr>
+          <p:cNvPr id="29" name="Text 27"/>
+          <p:cNvSpPr/>
+          <p:nvPr/>
+        </p:nvSpPr>
+        <p:spPr>
+          <a:xfrm>
+            <a:off x="6530188" y="4873752"/>
+            <a:ext cx="4838548" cy="384048"/>
+          </a:xfrm>
+          <a:prstGeom prst="rect">
+            <a:avLst/>
+          </a:prstGeom>
+          <a:noFill/>
+          <a:ln/>
+        </p:spPr>
+        <p:txBody>
+          <a:bodyPr wrap="square" lIns="0" tIns="0" rIns="0" bIns="0" rtlCol="0" anchor="ctr"/>
+          <a:lstStyle/>
+          <a:p>
+            <a:r>
+              <a:rPr lang="en-US" sz="1600" b="1" dirty="0" err="1">
+                <a:solidFill>
+                  <a:srgbClr val="1E2761"/>
                 </a:solidFill>
                 <a:latin typeface="Calibri" pitchFamily="34" charset="0"/>
                 <a:ea typeface="Calibri" pitchFamily="34" charset="-122"/>
                 <a:cs typeface="Calibri" pitchFamily="34" charset="-120"/>
               </a:rPr>
-              <a:t>Present? Which column(s)?</a:t>
-            </a:r>
-            <a:endParaRPr lang="en-US" sz="1050" dirty="0"/>
-          </a:p>
-        </p:txBody>
-      </p:sp>
-      <p:sp>
-        <p:nvSpPr>
-          <p:cNvPr id="29" name="Text 27"/>
-          <p:cNvSpPr/>
-          <p:nvPr/>
-        </p:nvSpPr>
-        <p:spPr>
-          <a:xfrm>
-            <a:off x="6530188" y="4873752"/>
-            <a:ext cx="4838548" cy="384048"/>
-          </a:xfrm>
-          <a:prstGeom prst="rect">
-            <a:avLst/>
-          </a:prstGeom>
-          <a:noFill/>
-          <a:ln/>
-        </p:spPr>
-        <p:txBody>
-          <a:bodyPr wrap="square" lIns="0" tIns="0" rIns="0" bIns="0" rtlCol="0" anchor="ctr"/>
-          <a:lstStyle/>
-          <a:p>
-            <a:pPr marL="0" indent="0" algn="l">
-              <a:buNone/>
-            </a:pPr>
-            <a:r>
-              <a:rPr lang="en-US" sz="2200" b="1" dirty="0">
+              <a:t>amount_usd</a:t>
+            </a:r>
+            <a:r>
+              <a:rPr lang="en-US" sz="1600" b="1" dirty="0">
                 <a:solidFill>
                   <a:srgbClr val="1E2761"/>
                 </a:solidFill>
@@ -6944,84 +7618,129 @@
                 <a:ea typeface="Calibri" pitchFamily="34" charset="-122"/>
                 <a:cs typeface="Calibri" pitchFamily="34" charset="-120"/>
               </a:rPr>
-              <a:t>[ ? ]</a:t>
-            </a:r>
-            <a:endParaRPr lang="en-US" sz="2200" dirty="0"/>
-          </a:p>
-        </p:txBody>
-      </p:sp>
-      <p:sp>
-        <p:nvSpPr>
-          <p:cNvPr id="30" name="Text 28"/>
-          <p:cNvSpPr/>
-          <p:nvPr/>
-        </p:nvSpPr>
-        <p:spPr>
-          <a:xfrm>
-            <a:off x="548640" y="6473952"/>
-            <a:ext cx="4572000" cy="274320"/>
-          </a:xfrm>
-          <a:prstGeom prst="rect">
-            <a:avLst/>
-          </a:prstGeom>
-          <a:noFill/>
-          <a:ln/>
-        </p:spPr>
-        <p:txBody>
-          <a:bodyPr wrap="square" lIns="0" tIns="0" rIns="0" bIns="0" rtlCol="0" anchor="ctr"/>
-          <a:lstStyle/>
-          <a:p>
-            <a:pPr marL="0" indent="0" algn="l">
-              <a:buNone/>
-            </a:pPr>
-            <a:r>
-              <a:rPr lang="en-US" sz="900" dirty="0">
-                <a:solidFill>
-                  <a:srgbClr val="6B7280"/>
+              <a:t>: </a:t>
+            </a:r>
+            <a:r>
+              <a:rPr lang="en-US" sz="1600" dirty="0">
+                <a:solidFill>
+                  <a:srgbClr val="1E2761"/>
                 </a:solidFill>
                 <a:latin typeface="Calibri" pitchFamily="34" charset="0"/>
                 <a:ea typeface="Calibri" pitchFamily="34" charset="-122"/>
                 <a:cs typeface="Calibri" pitchFamily="34" charset="-120"/>
               </a:rPr>
-              <a:t>Capstone Dataset Proposal</a:t>
-            </a:r>
-            <a:endParaRPr lang="en-US" sz="900" dirty="0"/>
-          </a:p>
-        </p:txBody>
-      </p:sp>
-      <p:sp>
-        <p:nvSpPr>
-          <p:cNvPr id="31" name="Text 29"/>
-          <p:cNvSpPr/>
-          <p:nvPr/>
-        </p:nvSpPr>
-        <p:spPr>
-          <a:xfrm>
-            <a:off x="8899855" y="6473952"/>
-            <a:ext cx="2743200" cy="274320"/>
-          </a:xfrm>
-          <a:prstGeom prst="rect">
-            <a:avLst/>
-          </a:prstGeom>
-          <a:noFill/>
-          <a:ln/>
-        </p:spPr>
-        <p:txBody>
-          <a:bodyPr wrap="square" lIns="0" tIns="0" rIns="0" bIns="0" rtlCol="0" anchor="ctr"/>
-          <a:lstStyle/>
-          <a:p>
-            <a:pPr marL="0" indent="0" algn="r">
-              <a:buNone/>
-            </a:pPr>
-            <a:r>
-              <a:rPr lang="en-US" sz="900" dirty="0">
-                <a:solidFill>
-                  <a:srgbClr val="6B7280"/>
+              <a:t>max $6,872.69 vs. 75th pct $131.75 (right-skewed)</a:t>
+            </a:r>
+          </a:p>
+          <a:p>
+            <a:r>
+              <a:rPr lang="en-US" sz="1600" b="1" dirty="0" err="1">
+                <a:solidFill>
+                  <a:srgbClr val="1E2761"/>
                 </a:solidFill>
                 <a:latin typeface="Calibri" pitchFamily="34" charset="0"/>
                 <a:ea typeface="Calibri" pitchFamily="34" charset="-122"/>
                 <a:cs typeface="Calibri" pitchFamily="34" charset="-120"/>
               </a:rPr>
+              <a:t>account_balance_usd</a:t>
+            </a:r>
+            <a:r>
+              <a:rPr lang="en-US" sz="1600" b="1" dirty="0">
+                <a:solidFill>
+                  <a:srgbClr val="1E2761"/>
+                </a:solidFill>
+                <a:latin typeface="Calibri" pitchFamily="34" charset="0"/>
+                <a:ea typeface="Calibri" pitchFamily="34" charset="-122"/>
+                <a:cs typeface="Calibri" pitchFamily="34" charset="-120"/>
+              </a:rPr>
+              <a:t>: </a:t>
+            </a:r>
+            <a:r>
+              <a:rPr lang="en-US" sz="1600" dirty="0">
+                <a:solidFill>
+                  <a:srgbClr val="1E2761"/>
+                </a:solidFill>
+                <a:latin typeface="Calibri" pitchFamily="34" charset="0"/>
+                <a:ea typeface="Calibri" pitchFamily="34" charset="-122"/>
+                <a:cs typeface="Calibri" pitchFamily="34" charset="-120"/>
+              </a:rPr>
+              <a:t>max $127,125.86 vs. 75th pct $3,944.12 (right-skewed)</a:t>
+            </a:r>
+          </a:p>
+        </p:txBody>
+      </p:sp>
+      <p:sp>
+        <p:nvSpPr>
+          <p:cNvPr id="30" name="Text 28"/>
+          <p:cNvSpPr/>
+          <p:nvPr/>
+        </p:nvSpPr>
+        <p:spPr>
+          <a:xfrm>
+            <a:off x="548640" y="6473952"/>
+            <a:ext cx="4572000" cy="274320"/>
+          </a:xfrm>
+          <a:prstGeom prst="rect">
+            <a:avLst/>
+          </a:prstGeom>
+          <a:noFill/>
+          <a:ln/>
+        </p:spPr>
+        <p:txBody>
+          <a:bodyPr wrap="square" lIns="0" tIns="0" rIns="0" bIns="0" rtlCol="0" anchor="ctr"/>
+          <a:lstStyle/>
+          <a:p>
+            <a:pPr marL="0" indent="0" algn="l">
+              <a:buNone/>
+            </a:pPr>
+            <a:r>
+              <a:rPr lang="en-US" sz="900" dirty="0">
+                <a:solidFill>
+                  <a:srgbClr val="6B7280"/>
+                </a:solidFill>
+                <a:latin typeface="Calibri" pitchFamily="34" charset="0"/>
+                <a:ea typeface="Calibri" pitchFamily="34" charset="-122"/>
+                <a:cs typeface="Calibri" pitchFamily="34" charset="-120"/>
+              </a:rPr>
+              <a:t>Capstone Dataset Proposal</a:t>
+            </a:r>
+            <a:endParaRPr lang="en-US" sz="900" dirty="0"/>
+          </a:p>
+        </p:txBody>
+      </p:sp>
+      <p:sp>
+        <p:nvSpPr>
+          <p:cNvPr id="31" name="Text 29"/>
+          <p:cNvSpPr/>
+          <p:nvPr/>
+        </p:nvSpPr>
+        <p:spPr>
+          <a:xfrm>
+            <a:off x="8899855" y="6473952"/>
+            <a:ext cx="2743200" cy="274320"/>
+          </a:xfrm>
+          <a:prstGeom prst="rect">
+            <a:avLst/>
+          </a:prstGeom>
+          <a:noFill/>
+          <a:ln/>
+        </p:spPr>
+        <p:txBody>
+          <a:bodyPr wrap="square" lIns="0" tIns="0" rIns="0" bIns="0" rtlCol="0" anchor="ctr"/>
+          <a:lstStyle/>
+          <a:p>
+            <a:pPr marL="0" indent="0" algn="r">
+              <a:buNone/>
+            </a:pPr>
+            <a:r>
+              <a:rPr lang="en-US" sz="900" dirty="0">
+                <a:solidFill>
+                  <a:srgbClr val="6B7280"/>
+                </a:solidFill>
+                <a:latin typeface="Calibri" pitchFamily="34" charset="0"/>
+                <a:ea typeface="Calibri" pitchFamily="34" charset="-122"/>
+                <a:cs typeface="Calibri" pitchFamily="34" charset="-120"/>
+              </a:rPr>
               <a:t>Topic 3 — EDA Findings</a:t>
             </a:r>
             <a:endParaRPr lang="en-US" sz="900" dirty="0"/>
@@ -7029,6 +7748,372 @@
         </p:txBody>
       </p:sp>
     </p:spTree>
+  </p:cSld>
+  <p:clrMapOvr>
+    <a:masterClrMapping/>
+  </p:clrMapOvr>
+</p:sld>
+</file>
+
+<file path=ppt/slides/slide8.xml><?xml version="1.0" encoding="utf-8"?>
+<p:sld xmlns:a="http://schemas.openxmlformats.org/drawingml/2006/main" xmlns:r="http://schemas.openxmlformats.org/officeDocument/2006/relationships" xmlns:p="http://schemas.openxmlformats.org/presentationml/2006/main">
+  <p:cSld>
+    <p:bg>
+      <p:bgPr>
+        <a:solidFill>
+          <a:srgbClr val="1E2761"/>
+        </a:solidFill>
+        <a:effectLst/>
+      </p:bgPr>
+    </p:bg>
+    <p:spTree>
+      <p:nvGrpSpPr>
+        <p:cNvPr id="1" name="">
+          <a:extLst>
+            <a:ext uri="{FF2B5EF4-FFF2-40B4-BE49-F238E27FC236}">
+              <a16:creationId xmlns:a16="http://schemas.microsoft.com/office/drawing/2014/main" id="{546CFC5A-2495-75AE-3689-8AC5B4358917}"/>
+            </a:ext>
+          </a:extLst>
+        </p:cNvPr>
+        <p:cNvGrpSpPr/>
+        <p:nvPr/>
+      </p:nvGrpSpPr>
+      <p:grpSpPr>
+        <a:xfrm>
+          <a:off x="0" y="0"/>
+          <a:ext cx="0" cy="0"/>
+          <a:chOff x="0" y="0"/>
+          <a:chExt cx="0" cy="0"/>
+        </a:xfrm>
+      </p:grpSpPr>
+      <p:sp>
+        <p:nvSpPr>
+          <p:cNvPr id="2" name="Shape 0">
+            <a:extLst>
+              <a:ext uri="{FF2B5EF4-FFF2-40B4-BE49-F238E27FC236}">
+                <a16:creationId xmlns:a16="http://schemas.microsoft.com/office/drawing/2014/main" id="{9F88EEB4-9826-50EA-2235-67CB85048A83}"/>
+              </a:ext>
+            </a:extLst>
+          </p:cNvPr>
+          <p:cNvSpPr/>
+          <p:nvPr/>
+        </p:nvSpPr>
+        <p:spPr>
+          <a:xfrm>
+            <a:off x="8899855" y="-1463040"/>
+            <a:ext cx="4754880" cy="4754880"/>
+          </a:xfrm>
+          <a:prstGeom prst="ellipse">
+            <a:avLst/>
+          </a:prstGeom>
+          <a:solidFill>
+            <a:srgbClr val="27317A"/>
+          </a:solidFill>
+          <a:ln/>
+        </p:spPr>
+        <p:txBody>
+          <a:bodyPr/>
+          <a:lstStyle/>
+          <a:p>
+            <a:endParaRPr lang="en-BH"/>
+          </a:p>
+        </p:txBody>
+      </p:sp>
+      <p:sp>
+        <p:nvSpPr>
+          <p:cNvPr id="3" name="Shape 1">
+            <a:extLst>
+              <a:ext uri="{FF2B5EF4-FFF2-40B4-BE49-F238E27FC236}">
+                <a16:creationId xmlns:a16="http://schemas.microsoft.com/office/drawing/2014/main" id="{0916CAAC-388A-3D2A-52B4-B7A4FA192429}"/>
+              </a:ext>
+            </a:extLst>
+          </p:cNvPr>
+          <p:cNvSpPr/>
+          <p:nvPr/>
+        </p:nvSpPr>
+        <p:spPr>
+          <a:xfrm>
+            <a:off x="-1645920" y="4480560"/>
+            <a:ext cx="3840480" cy="3840480"/>
+          </a:xfrm>
+          <a:prstGeom prst="ellipse">
+            <a:avLst/>
+          </a:prstGeom>
+          <a:solidFill>
+            <a:srgbClr val="27317A"/>
+          </a:solidFill>
+          <a:ln/>
+        </p:spPr>
+        <p:txBody>
+          <a:bodyPr/>
+          <a:lstStyle/>
+          <a:p>
+            <a:endParaRPr lang="en-BH"/>
+          </a:p>
+        </p:txBody>
+      </p:sp>
+      <p:sp>
+        <p:nvSpPr>
+          <p:cNvPr id="4" name="Text 2">
+            <a:extLst>
+              <a:ext uri="{FF2B5EF4-FFF2-40B4-BE49-F238E27FC236}">
+                <a16:creationId xmlns:a16="http://schemas.microsoft.com/office/drawing/2014/main" id="{20EA163A-08B1-78EF-B42E-DBB4D7168141}"/>
+              </a:ext>
+            </a:extLst>
+          </p:cNvPr>
+          <p:cNvSpPr/>
+          <p:nvPr/>
+        </p:nvSpPr>
+        <p:spPr>
+          <a:xfrm>
+            <a:off x="548640" y="1965960"/>
+            <a:ext cx="8229600" cy="365760"/>
+          </a:xfrm>
+          <a:prstGeom prst="rect">
+            <a:avLst/>
+          </a:prstGeom>
+          <a:noFill/>
+          <a:ln/>
+        </p:spPr>
+        <p:txBody>
+          <a:bodyPr wrap="square" lIns="0" tIns="0" rIns="0" bIns="0" rtlCol="0" anchor="ctr"/>
+          <a:lstStyle/>
+          <a:p>
+            <a:pPr marL="0" indent="0">
+              <a:buNone/>
+            </a:pPr>
+            <a:endParaRPr lang="en-US" sz="1300" dirty="0"/>
+          </a:p>
+        </p:txBody>
+      </p:sp>
+      <p:sp>
+        <p:nvSpPr>
+          <p:cNvPr id="5" name="Text 3">
+            <a:extLst>
+              <a:ext uri="{FF2B5EF4-FFF2-40B4-BE49-F238E27FC236}">
+                <a16:creationId xmlns:a16="http://schemas.microsoft.com/office/drawing/2014/main" id="{60692DF7-2799-93CA-44BB-8F889C77555A}"/>
+              </a:ext>
+            </a:extLst>
+          </p:cNvPr>
+          <p:cNvSpPr/>
+          <p:nvPr/>
+        </p:nvSpPr>
+        <p:spPr>
+          <a:xfrm>
+            <a:off x="548640" y="2377440"/>
+            <a:ext cx="9601200" cy="1005840"/>
+          </a:xfrm>
+          <a:prstGeom prst="rect">
+            <a:avLst/>
+          </a:prstGeom>
+          <a:noFill/>
+          <a:ln/>
+        </p:spPr>
+        <p:txBody>
+          <a:bodyPr wrap="square" lIns="0" tIns="0" rIns="0" bIns="0" rtlCol="0" anchor="ctr"/>
+          <a:lstStyle/>
+          <a:p>
+            <a:r>
+              <a:rPr lang="en-BH" sz="4400" dirty="0">
+                <a:solidFill>
+                  <a:schemeClr val="bg2"/>
+                </a:solidFill>
+                <a:latin typeface="Cambria" panose="02040503050406030204" pitchFamily="18" charset="0"/>
+              </a:rPr>
+              <a:t>Thank You</a:t>
+            </a:r>
+          </a:p>
+        </p:txBody>
+      </p:sp>
+      <p:sp>
+        <p:nvSpPr>
+          <p:cNvPr id="6" name="Text 4">
+            <a:extLst>
+              <a:ext uri="{FF2B5EF4-FFF2-40B4-BE49-F238E27FC236}">
+                <a16:creationId xmlns:a16="http://schemas.microsoft.com/office/drawing/2014/main" id="{B0D60B7E-EE5B-C377-8BFD-90A880C1ED82}"/>
+              </a:ext>
+            </a:extLst>
+          </p:cNvPr>
+          <p:cNvSpPr/>
+          <p:nvPr/>
+        </p:nvSpPr>
+        <p:spPr>
+          <a:xfrm>
+            <a:off x="548640" y="3337560"/>
+            <a:ext cx="9144000" cy="457200"/>
+          </a:xfrm>
+          <a:prstGeom prst="rect">
+            <a:avLst/>
+          </a:prstGeom>
+          <a:noFill/>
+          <a:ln/>
+        </p:spPr>
+        <p:txBody>
+          <a:bodyPr wrap="square" lIns="0" tIns="0" rIns="0" bIns="0" rtlCol="0" anchor="ctr"/>
+          <a:lstStyle/>
+          <a:p>
+            <a:pPr marL="0" indent="0">
+              <a:buNone/>
+            </a:pPr>
+            <a:r>
+              <a:rPr lang="en-US" sz="1800" dirty="0">
+                <a:solidFill>
+                  <a:srgbClr val="CADCFC"/>
+                </a:solidFill>
+                <a:latin typeface="Calibri" pitchFamily="34" charset="0"/>
+                <a:ea typeface="Calibri" pitchFamily="34" charset="-122"/>
+                <a:cs typeface="Calibri" pitchFamily="34" charset="-120"/>
+              </a:rPr>
+              <a:t>Any questions?</a:t>
+            </a:r>
+            <a:endParaRPr lang="en-US" sz="1800" dirty="0"/>
+          </a:p>
+        </p:txBody>
+      </p:sp>
+      <p:sp>
+        <p:nvSpPr>
+          <p:cNvPr id="7" name="Shape 5">
+            <a:extLst>
+              <a:ext uri="{FF2B5EF4-FFF2-40B4-BE49-F238E27FC236}">
+                <a16:creationId xmlns:a16="http://schemas.microsoft.com/office/drawing/2014/main" id="{1F4BE328-3EAF-4FCB-94C5-98A5898FCD29}"/>
+              </a:ext>
+            </a:extLst>
+          </p:cNvPr>
+          <p:cNvSpPr/>
+          <p:nvPr/>
+        </p:nvSpPr>
+        <p:spPr>
+          <a:xfrm>
+            <a:off x="548640" y="3977640"/>
+            <a:ext cx="2011680" cy="0"/>
+          </a:xfrm>
+          <a:prstGeom prst="line">
+            <a:avLst/>
+          </a:prstGeom>
+          <a:noFill/>
+          <a:ln w="19050">
+            <a:solidFill>
+              <a:srgbClr val="CADCFC"/>
+            </a:solidFill>
+            <a:prstDash val="solid"/>
+          </a:ln>
+        </p:spPr>
+        <p:txBody>
+          <a:bodyPr/>
+          <a:lstStyle/>
+          <a:p>
+            <a:endParaRPr lang="en-BH"/>
+          </a:p>
+        </p:txBody>
+      </p:sp>
+      <p:sp>
+        <p:nvSpPr>
+          <p:cNvPr id="8" name="Text 6">
+            <a:extLst>
+              <a:ext uri="{FF2B5EF4-FFF2-40B4-BE49-F238E27FC236}">
+                <a16:creationId xmlns:a16="http://schemas.microsoft.com/office/drawing/2014/main" id="{167ED341-5F02-8E5C-A1D6-F741284000F5}"/>
+              </a:ext>
+            </a:extLst>
+          </p:cNvPr>
+          <p:cNvSpPr/>
+          <p:nvPr/>
+        </p:nvSpPr>
+        <p:spPr>
+          <a:xfrm>
+            <a:off x="548640" y="5440680"/>
+            <a:ext cx="4572000" cy="320040"/>
+          </a:xfrm>
+          <a:prstGeom prst="rect">
+            <a:avLst/>
+          </a:prstGeom>
+          <a:noFill/>
+          <a:ln/>
+        </p:spPr>
+        <p:txBody>
+          <a:bodyPr wrap="square" lIns="0" tIns="0" rIns="0" bIns="0" rtlCol="0" anchor="ctr"/>
+          <a:lstStyle/>
+          <a:p>
+            <a:pPr marL="0" indent="0">
+              <a:buNone/>
+            </a:pPr>
+            <a:endParaRPr lang="en-US" sz="1400" dirty="0"/>
+          </a:p>
+        </p:txBody>
+      </p:sp>
+      <p:sp>
+        <p:nvSpPr>
+          <p:cNvPr id="9" name="Text 7">
+            <a:extLst>
+              <a:ext uri="{FF2B5EF4-FFF2-40B4-BE49-F238E27FC236}">
+                <a16:creationId xmlns:a16="http://schemas.microsoft.com/office/drawing/2014/main" id="{6B40298F-0C41-987D-E93E-2038ED178B77}"/>
+              </a:ext>
+            </a:extLst>
+          </p:cNvPr>
+          <p:cNvSpPr/>
+          <p:nvPr/>
+        </p:nvSpPr>
+        <p:spPr>
+          <a:xfrm>
+            <a:off x="548640" y="5742432"/>
+            <a:ext cx="4572000" cy="274320"/>
+          </a:xfrm>
+          <a:prstGeom prst="rect">
+            <a:avLst/>
+          </a:prstGeom>
+          <a:noFill/>
+          <a:ln/>
+        </p:spPr>
+        <p:txBody>
+          <a:bodyPr wrap="square" lIns="0" tIns="0" rIns="0" bIns="0" rtlCol="0" anchor="ctr"/>
+          <a:lstStyle/>
+          <a:p>
+            <a:pPr marL="0" indent="0">
+              <a:buNone/>
+            </a:pPr>
+            <a:endParaRPr lang="en-US" sz="1200" dirty="0"/>
+          </a:p>
+        </p:txBody>
+      </p:sp>
+      <p:sp>
+        <p:nvSpPr>
+          <p:cNvPr id="10" name="Text 8">
+            <a:extLst>
+              <a:ext uri="{FF2B5EF4-FFF2-40B4-BE49-F238E27FC236}">
+                <a16:creationId xmlns:a16="http://schemas.microsoft.com/office/drawing/2014/main" id="{BEE9C4AA-A299-9748-B036-8DDC9BA6E91B}"/>
+              </a:ext>
+            </a:extLst>
+          </p:cNvPr>
+          <p:cNvSpPr/>
+          <p:nvPr/>
+        </p:nvSpPr>
+        <p:spPr>
+          <a:xfrm>
+            <a:off x="548640" y="6355080"/>
+            <a:ext cx="10058400" cy="320040"/>
+          </a:xfrm>
+          <a:prstGeom prst="rect">
+            <a:avLst/>
+          </a:prstGeom>
+          <a:noFill/>
+          <a:ln/>
+        </p:spPr>
+        <p:txBody>
+          <a:bodyPr wrap="square" lIns="0" tIns="0" rIns="0" bIns="0" rtlCol="0" anchor="ctr"/>
+          <a:lstStyle/>
+          <a:p>
+            <a:pPr marL="0" indent="0">
+              <a:buNone/>
+            </a:pPr>
+            <a:endParaRPr lang="en-US" sz="1100" dirty="0"/>
+          </a:p>
+        </p:txBody>
+      </p:sp>
+    </p:spTree>
+    <p:extLst>
+      <p:ext uri="{BB962C8B-B14F-4D97-AF65-F5344CB8AC3E}">
+        <p14:creationId xmlns:p14="http://schemas.microsoft.com/office/powerpoint/2010/main" val="2429070947"/>
+      </p:ext>
+    </p:extLst>
   </p:cSld>
   <p:clrMapOvr>
     <a:masterClrMapping/>

--- a/projects/Capstone Project/1. Lightning Talk #1/Presentation.pptx
+++ b/projects/Capstone Project/1. Lightning Talk #1/Presentation.pptx
@@ -1544,7 +1544,7 @@
                 <a:ea typeface="Calibri" pitchFamily="34" charset="-122"/>
                 <a:cs typeface="Calibri" pitchFamily="34" charset="-120"/>
               </a:rPr>
-              <a:t>6/5/2026</a:t>
+              <a:t>6/8/2026</a:t>
             </a:r>
             <a:endParaRPr lang="en-US" sz="1200" dirty="0"/>
           </a:p>
